--- a/數位資產與金融指數動態關聯研究.pptx.pptx
+++ b/數位資產與金融指數動態關聯研究.pptx.pptx
@@ -18,9 +18,9 @@
     <p:sldId id="269" r:id="rId9"/>
     <p:sldId id="264" r:id="rId10"/>
     <p:sldId id="265" r:id="rId11"/>
-    <p:sldId id="263" r:id="rId12"/>
-    <p:sldId id="266" r:id="rId13"/>
-    <p:sldId id="267" r:id="rId14"/>
+    <p:sldId id="270" r:id="rId12"/>
+    <p:sldId id="263" r:id="rId13"/>
+    <p:sldId id="266" r:id="rId14"/>
   </p:sldIdLst>
   <p:sldSz cx="18288000" cy="10287000"/>
   <p:notesSz cx="6858000" cy="9144000"/>
@@ -156,6 +156,137 @@
 </p:presentation>
 </file>
 
+<file path=ppt/revisionInfo.xml><?xml version="1.0" encoding="utf-8"?>
+<p1510:revInfo xmlns:a="http://schemas.openxmlformats.org/drawingml/2006/main" xmlns:r="http://schemas.openxmlformats.org/officeDocument/2006/relationships" xmlns:p1510="http://schemas.microsoft.com/office/powerpoint/2015/10/main">
+  <p1510:revLst>
+    <p1510:client id="{6696B2DA-DD7A-4D37-A974-E878BD62707E}" v="13" dt="2026-06-14T21:00:13.132"/>
+  </p1510:revLst>
+</p1510:revInfo>
+</file>
+
+<file path=ppt/changesInfos/changesInfo1.xml><?xml version="1.0" encoding="utf-8"?>
+<pc:chgInfo xmlns:a="http://schemas.openxmlformats.org/drawingml/2006/main" xmlns:r="http://schemas.openxmlformats.org/officeDocument/2006/relationships" xmlns:ac="http://schemas.microsoft.com/office/drawing/2013/main/command" xmlns:pc="http://schemas.microsoft.com/office/powerpoint/2013/main/command">
+  <pc:docChgLst>
+    <pc:chgData name="品霖 陳" userId="5ef9ed508cbbf1ec" providerId="LiveId" clId="{5EA5911F-D3CC-464D-872A-55AFC748B5BC}"/>
+    <pc:docChg chg="undo custSel addSld delSld modSld">
+      <pc:chgData name="品霖 陳" userId="5ef9ed508cbbf1ec" providerId="LiveId" clId="{5EA5911F-D3CC-464D-872A-55AFC748B5BC}" dt="2026-06-14T21:00:44.400" v="200" actId="1076"/>
+      <pc:docMkLst>
+        <pc:docMk/>
+      </pc:docMkLst>
+      <pc:sldChg chg="modSp mod">
+        <pc:chgData name="品霖 陳" userId="5ef9ed508cbbf1ec" providerId="LiveId" clId="{5EA5911F-D3CC-464D-872A-55AFC748B5BC}" dt="2026-06-14T20:55:39.293" v="1" actId="1076"/>
+        <pc:sldMkLst>
+          <pc:docMk/>
+          <pc:sldMk cId="0" sldId="256"/>
+        </pc:sldMkLst>
+        <pc:grpChg chg="mod">
+          <ac:chgData name="品霖 陳" userId="5ef9ed508cbbf1ec" providerId="LiveId" clId="{5EA5911F-D3CC-464D-872A-55AFC748B5BC}" dt="2026-06-14T20:55:39.293" v="1" actId="1076"/>
+          <ac:grpSpMkLst>
+            <pc:docMk/>
+            <pc:sldMk cId="0" sldId="256"/>
+            <ac:grpSpMk id="2" creationId="{00000000-0000-0000-0000-000000000000}"/>
+          </ac:grpSpMkLst>
+        </pc:grpChg>
+      </pc:sldChg>
+      <pc:sldChg chg="del">
+        <pc:chgData name="品霖 陳" userId="5ef9ed508cbbf1ec" providerId="LiveId" clId="{5EA5911F-D3CC-464D-872A-55AFC748B5BC}" dt="2026-06-14T20:55:59.703" v="2" actId="47"/>
+        <pc:sldMkLst>
+          <pc:docMk/>
+          <pc:sldMk cId="0" sldId="267"/>
+        </pc:sldMkLst>
+      </pc:sldChg>
+      <pc:sldChg chg="addSp delSp modSp add mod">
+        <pc:chgData name="品霖 陳" userId="5ef9ed508cbbf1ec" providerId="LiveId" clId="{5EA5911F-D3CC-464D-872A-55AFC748B5BC}" dt="2026-06-14T21:00:44.400" v="200" actId="1076"/>
+        <pc:sldMkLst>
+          <pc:docMk/>
+          <pc:sldMk cId="11952152" sldId="270"/>
+        </pc:sldMkLst>
+        <pc:spChg chg="mod">
+          <ac:chgData name="品霖 陳" userId="5ef9ed508cbbf1ec" providerId="LiveId" clId="{5EA5911F-D3CC-464D-872A-55AFC748B5BC}" dt="2026-06-14T20:56:29.677" v="22" actId="1076"/>
+          <ac:spMkLst>
+            <pc:docMk/>
+            <pc:sldMk cId="11952152" sldId="270"/>
+            <ac:spMk id="3" creationId="{55199EFE-FC83-24AA-0CB3-CAF05F57A95E}"/>
+          </ac:spMkLst>
+        </pc:spChg>
+        <pc:spChg chg="mod">
+          <ac:chgData name="品霖 陳" userId="5ef9ed508cbbf1ec" providerId="LiveId" clId="{5EA5911F-D3CC-464D-872A-55AFC748B5BC}" dt="2026-06-14T20:56:30.972" v="23" actId="20577"/>
+          <ac:spMkLst>
+            <pc:docMk/>
+            <pc:sldMk cId="11952152" sldId="270"/>
+            <ac:spMk id="6" creationId="{D28AEFC6-E73D-8F67-03AF-A45400B75261}"/>
+          </ac:spMkLst>
+        </pc:spChg>
+        <pc:spChg chg="mod">
+          <ac:chgData name="品霖 陳" userId="5ef9ed508cbbf1ec" providerId="LiveId" clId="{5EA5911F-D3CC-464D-872A-55AFC748B5BC}" dt="2026-06-14T20:58:07.573" v="79" actId="20577"/>
+          <ac:spMkLst>
+            <pc:docMk/>
+            <pc:sldMk cId="11952152" sldId="270"/>
+            <ac:spMk id="9" creationId="{81F27BE9-F59C-C5C2-9A82-DE155662355E}"/>
+          </ac:spMkLst>
+        </pc:spChg>
+        <pc:spChg chg="mod">
+          <ac:chgData name="品霖 陳" userId="5ef9ed508cbbf1ec" providerId="LiveId" clId="{5EA5911F-D3CC-464D-872A-55AFC748B5BC}" dt="2026-06-14T20:58:57.894" v="95" actId="403"/>
+          <ac:spMkLst>
+            <pc:docMk/>
+            <pc:sldMk cId="11952152" sldId="270"/>
+            <ac:spMk id="10" creationId="{25BC6185-3162-C929-F7E2-FF2FB9C1386D}"/>
+          </ac:spMkLst>
+        </pc:spChg>
+        <pc:spChg chg="del">
+          <ac:chgData name="品霖 陳" userId="5ef9ed508cbbf1ec" providerId="LiveId" clId="{5EA5911F-D3CC-464D-872A-55AFC748B5BC}" dt="2026-06-14T20:56:20.267" v="16" actId="478"/>
+          <ac:spMkLst>
+            <pc:docMk/>
+            <pc:sldMk cId="11952152" sldId="270"/>
+            <ac:spMk id="11" creationId="{BAE4BE70-BFC4-3080-0CF5-89FA97AB3A87}"/>
+          </ac:spMkLst>
+        </pc:spChg>
+        <pc:spChg chg="del mod">
+          <ac:chgData name="品霖 陳" userId="5ef9ed508cbbf1ec" providerId="LiveId" clId="{5EA5911F-D3CC-464D-872A-55AFC748B5BC}" dt="2026-06-14T20:56:20.269" v="18"/>
+          <ac:spMkLst>
+            <pc:docMk/>
+            <pc:sldMk cId="11952152" sldId="270"/>
+            <ac:spMk id="12" creationId="{FA02AAF4-26A5-C97B-DF06-30ECFEDFF26D}"/>
+          </ac:spMkLst>
+        </pc:spChg>
+        <pc:spChg chg="add mod">
+          <ac:chgData name="品霖 陳" userId="5ef9ed508cbbf1ec" providerId="LiveId" clId="{5EA5911F-D3CC-464D-872A-55AFC748B5BC}" dt="2026-06-14T21:00:44.400" v="200" actId="1076"/>
+          <ac:spMkLst>
+            <pc:docMk/>
+            <pc:sldMk cId="11952152" sldId="270"/>
+            <ac:spMk id="13" creationId="{7A28F22F-8EEB-20B5-1A87-87EEF6B353C3}"/>
+          </ac:spMkLst>
+        </pc:spChg>
+        <pc:spChg chg="add mod">
+          <ac:chgData name="品霖 陳" userId="5ef9ed508cbbf1ec" providerId="LiveId" clId="{5EA5911F-D3CC-464D-872A-55AFC748B5BC}" dt="2026-06-14T21:00:37.225" v="199" actId="20577"/>
+          <ac:spMkLst>
+            <pc:docMk/>
+            <pc:sldMk cId="11952152" sldId="270"/>
+            <ac:spMk id="14" creationId="{44FFCA83-24C8-557A-77DB-C2CE471C63D2}"/>
+          </ac:spMkLst>
+        </pc:spChg>
+        <pc:grpChg chg="del">
+          <ac:chgData name="品霖 陳" userId="5ef9ed508cbbf1ec" providerId="LiveId" clId="{5EA5911F-D3CC-464D-872A-55AFC748B5BC}" dt="2026-06-14T20:56:24.648" v="20" actId="478"/>
+          <ac:grpSpMkLst>
+            <pc:docMk/>
+            <pc:sldMk cId="11952152" sldId="270"/>
+            <ac:grpSpMk id="4" creationId="{E556ACAF-B6DD-B4F6-8829-4D603DDC8995}"/>
+          </ac:grpSpMkLst>
+        </pc:grpChg>
+        <pc:picChg chg="del">
+          <ac:chgData name="品霖 陳" userId="5ef9ed508cbbf1ec" providerId="LiveId" clId="{5EA5911F-D3CC-464D-872A-55AFC748B5BC}" dt="2026-06-14T20:56:15.915" v="14" actId="478"/>
+          <ac:picMkLst>
+            <pc:docMk/>
+            <pc:sldMk cId="11952152" sldId="270"/>
+            <ac:picMk id="17" creationId="{EA1CB6D0-A675-77A5-BECD-A59B15F43778}"/>
+          </ac:picMkLst>
+        </pc:picChg>
+      </pc:sldChg>
+    </pc:docChg>
+  </pc:docChgLst>
+</pc:chgInfo>
+</file>
+
 <file path=ppt/notesMasters/notesMaster1.xml><?xml version="1.0" encoding="utf-8"?>
 <p:notesMaster xmlns:a="http://schemas.openxmlformats.org/drawingml/2006/main" xmlns:r="http://schemas.openxmlformats.org/officeDocument/2006/relationships" xmlns:p="http://schemas.openxmlformats.org/presentationml/2006/main">
   <p:cSld>
@@ -238,7 +369,7 @@
           <a:p>
             <a:fld id="{B7268E1E-0E44-426D-905E-8AD9B19D2182}" type="datetimeFigureOut">
               <a:rPr lang="cs-CZ" smtClean="0"/>
-              <a:t>14.06.2026</a:t>
+              <a:t>15.06.2026</a:t>
             </a:fld>
             <a:endParaRPr lang="cs-CZ"/>
           </a:p>
@@ -600,8 +731,8 @@
         </p:nvSpPr>
         <p:spPr>
           <a:xfrm>
-            <a:off x="2857500" y="512763"/>
-            <a:ext cx="3429000" cy="2566987"/>
+            <a:off x="2290763" y="512763"/>
+            <a:ext cx="4562475" cy="2566987"/>
           </a:xfrm>
           <a:prstGeom prst="rect">
             <a:avLst/>
@@ -941,7 +1072,13 @@
   <p:cSld>
     <p:spTree>
       <p:nvGrpSpPr>
-        <p:cNvPr id="1" name=""/>
+        <p:cNvPr id="1" name="">
+          <a:extLst>
+            <a:ext uri="{FF2B5EF4-FFF2-40B4-BE49-F238E27FC236}">
+              <a16:creationId xmlns:a16="http://schemas.microsoft.com/office/drawing/2014/main" id="{3483491B-1D60-8735-A4EE-6DA931FB6A12}"/>
+            </a:ext>
+          </a:extLst>
+        </p:cNvPr>
         <p:cNvGrpSpPr/>
         <p:nvPr/>
       </p:nvGrpSpPr>
@@ -955,7 +1092,13 @@
       </p:grpSpPr>
       <p:sp>
         <p:nvSpPr>
-          <p:cNvPr id="2" name="Header Placeholder 1"/>
+          <p:cNvPr id="2" name="Header Placeholder 1">
+            <a:extLst>
+              <a:ext uri="{FF2B5EF4-FFF2-40B4-BE49-F238E27FC236}">
+                <a16:creationId xmlns:a16="http://schemas.microsoft.com/office/drawing/2014/main" id="{42908101-7C9C-04BB-CBA2-C831D2A4F227}"/>
+              </a:ext>
+            </a:extLst>
+          </p:cNvPr>
           <p:cNvSpPr>
             <a:spLocks noGrp="1"/>
           </p:cNvSpPr>
@@ -986,7 +1129,13 @@
       </p:sp>
       <p:sp>
         <p:nvSpPr>
-          <p:cNvPr id="3" name="Date Placeholder 2"/>
+          <p:cNvPr id="3" name="Date Placeholder 2">
+            <a:extLst>
+              <a:ext uri="{FF2B5EF4-FFF2-40B4-BE49-F238E27FC236}">
+                <a16:creationId xmlns:a16="http://schemas.microsoft.com/office/drawing/2014/main" id="{F1F93BC2-37F7-870D-7456-5886851BD879}"/>
+              </a:ext>
+            </a:extLst>
+          </p:cNvPr>
           <p:cNvSpPr>
             <a:spLocks noGrp="1"/>
           </p:cNvSpPr>
@@ -1020,7 +1169,13 @@
       </p:sp>
       <p:sp>
         <p:nvSpPr>
-          <p:cNvPr id="4" name="Slide Image Placeholder 3"/>
+          <p:cNvPr id="4" name="Slide Image Placeholder 3">
+            <a:extLst>
+              <a:ext uri="{FF2B5EF4-FFF2-40B4-BE49-F238E27FC236}">
+                <a16:creationId xmlns:a16="http://schemas.microsoft.com/office/drawing/2014/main" id="{1074B545-4B48-77AF-3BA6-FEC900BE3D39}"/>
+              </a:ext>
+            </a:extLst>
+          </p:cNvPr>
           <p:cNvSpPr>
             <a:spLocks noGrp="1" noRot="1" noChangeAspect="1"/>
           </p:cNvSpPr>
@@ -1053,7 +1208,13 @@
       </p:sp>
       <p:sp>
         <p:nvSpPr>
-          <p:cNvPr id="5" name="Notes Placeholder 4"/>
+          <p:cNvPr id="5" name="Notes Placeholder 4">
+            <a:extLst>
+              <a:ext uri="{FF2B5EF4-FFF2-40B4-BE49-F238E27FC236}">
+                <a16:creationId xmlns:a16="http://schemas.microsoft.com/office/drawing/2014/main" id="{B8E59739-23B7-47EF-7D7D-8842CAA26FC0}"/>
+              </a:ext>
+            </a:extLst>
+          </p:cNvPr>
           <p:cNvSpPr>
             <a:spLocks noGrp="1"/>
           </p:cNvSpPr>
@@ -1080,7 +1241,13 @@
       </p:sp>
       <p:sp>
         <p:nvSpPr>
-          <p:cNvPr id="6" name="Footer Placeholder 5"/>
+          <p:cNvPr id="6" name="Footer Placeholder 5">
+            <a:extLst>
+              <a:ext uri="{FF2B5EF4-FFF2-40B4-BE49-F238E27FC236}">
+                <a16:creationId xmlns:a16="http://schemas.microsoft.com/office/drawing/2014/main" id="{E28621FC-F61A-E5F3-E43D-5E632C9CE9E2}"/>
+              </a:ext>
+            </a:extLst>
+          </p:cNvPr>
           <p:cNvSpPr>
             <a:spLocks noGrp="1"/>
           </p:cNvSpPr>
@@ -1111,7 +1278,13 @@
       </p:sp>
       <p:sp>
         <p:nvSpPr>
-          <p:cNvPr id="7" name="Slide Number Placeholder 6"/>
+          <p:cNvPr id="7" name="Slide Number Placeholder 6">
+            <a:extLst>
+              <a:ext uri="{FF2B5EF4-FFF2-40B4-BE49-F238E27FC236}">
+                <a16:creationId xmlns:a16="http://schemas.microsoft.com/office/drawing/2014/main" id="{43415899-2D41-B1AA-2D3F-52134DB752D7}"/>
+              </a:ext>
+            </a:extLst>
+          </p:cNvPr>
           <p:cNvSpPr>
             <a:spLocks noGrp="1"/>
           </p:cNvSpPr>
@@ -1144,6 +1317,11 @@
         </p:txBody>
       </p:sp>
     </p:spTree>
+    <p:extLst>
+      <p:ext uri="{BB962C8B-B14F-4D97-AF65-F5344CB8AC3E}">
+        <p14:creationId xmlns:p14="http://schemas.microsoft.com/office/powerpoint/2010/main" val="2620267748"/>
+      </p:ext>
+    </p:extLst>
   </p:cSld>
   <p:clrMapOvr>
     <a:masterClrMapping/>
@@ -1460,8 +1638,8 @@
         </p:nvSpPr>
         <p:spPr>
           <a:xfrm>
-            <a:off x="2857500" y="512763"/>
-            <a:ext cx="3429000" cy="2566987"/>
+            <a:off x="2290763" y="512763"/>
+            <a:ext cx="4562475" cy="2566987"/>
           </a:xfrm>
           <a:prstGeom prst="rect">
             <a:avLst/>
@@ -3528,7 +3706,7 @@
             <a:fld id="{1D8BD707-D9CF-40AE-B4C6-C98DA3205C09}" type="datetimeFigureOut">
               <a:rPr lang="en-US" smtClean="0"/>
               <a:pPr/>
-              <a:t>6/14/2026</a:t>
+              <a:t>6/15/2026</a:t>
             </a:fld>
             <a:endParaRPr lang="en-US"/>
           </a:p>
@@ -3693,7 +3871,7 @@
             <a:fld id="{1D8BD707-D9CF-40AE-B4C6-C98DA3205C09}" type="datetimeFigureOut">
               <a:rPr lang="en-US" smtClean="0"/>
               <a:pPr/>
-              <a:t>6/14/2026</a:t>
+              <a:t>6/15/2026</a:t>
             </a:fld>
             <a:endParaRPr lang="en-US"/>
           </a:p>
@@ -3868,7 +4046,7 @@
             <a:fld id="{1D8BD707-D9CF-40AE-B4C6-C98DA3205C09}" type="datetimeFigureOut">
               <a:rPr lang="en-US" smtClean="0"/>
               <a:pPr/>
-              <a:t>6/14/2026</a:t>
+              <a:t>6/15/2026</a:t>
             </a:fld>
             <a:endParaRPr lang="en-US"/>
           </a:p>
@@ -4033,7 +4211,7 @@
             <a:fld id="{1D8BD707-D9CF-40AE-B4C6-C98DA3205C09}" type="datetimeFigureOut">
               <a:rPr lang="en-US" smtClean="0"/>
               <a:pPr/>
-              <a:t>6/14/2026</a:t>
+              <a:t>6/15/2026</a:t>
             </a:fld>
             <a:endParaRPr lang="en-US"/>
           </a:p>
@@ -4275,7 +4453,7 @@
             <a:fld id="{1D8BD707-D9CF-40AE-B4C6-C98DA3205C09}" type="datetimeFigureOut">
               <a:rPr lang="en-US" smtClean="0"/>
               <a:pPr/>
-              <a:t>6/14/2026</a:t>
+              <a:t>6/15/2026</a:t>
             </a:fld>
             <a:endParaRPr lang="en-US"/>
           </a:p>
@@ -4557,7 +4735,7 @@
             <a:fld id="{1D8BD707-D9CF-40AE-B4C6-C98DA3205C09}" type="datetimeFigureOut">
               <a:rPr lang="en-US" smtClean="0"/>
               <a:pPr/>
-              <a:t>6/14/2026</a:t>
+              <a:t>6/15/2026</a:t>
             </a:fld>
             <a:endParaRPr lang="en-US"/>
           </a:p>
@@ -4973,7 +5151,7 @@
             <a:fld id="{1D8BD707-D9CF-40AE-B4C6-C98DA3205C09}" type="datetimeFigureOut">
               <a:rPr lang="en-US" smtClean="0"/>
               <a:pPr/>
-              <a:t>6/14/2026</a:t>
+              <a:t>6/15/2026</a:t>
             </a:fld>
             <a:endParaRPr lang="en-US"/>
           </a:p>
@@ -5087,7 +5265,7 @@
             <a:fld id="{1D8BD707-D9CF-40AE-B4C6-C98DA3205C09}" type="datetimeFigureOut">
               <a:rPr lang="en-US" smtClean="0"/>
               <a:pPr/>
-              <a:t>6/14/2026</a:t>
+              <a:t>6/15/2026</a:t>
             </a:fld>
             <a:endParaRPr lang="en-US"/>
           </a:p>
@@ -5179,7 +5357,7 @@
             <a:fld id="{1D8BD707-D9CF-40AE-B4C6-C98DA3205C09}" type="datetimeFigureOut">
               <a:rPr lang="en-US" smtClean="0"/>
               <a:pPr/>
-              <a:t>6/14/2026</a:t>
+              <a:t>6/15/2026</a:t>
             </a:fld>
             <a:endParaRPr lang="en-US"/>
           </a:p>
@@ -5451,7 +5629,7 @@
             <a:fld id="{1D8BD707-D9CF-40AE-B4C6-C98DA3205C09}" type="datetimeFigureOut">
               <a:rPr lang="en-US" smtClean="0"/>
               <a:pPr/>
-              <a:t>6/14/2026</a:t>
+              <a:t>6/15/2026</a:t>
             </a:fld>
             <a:endParaRPr lang="en-US"/>
           </a:p>
@@ -5700,7 +5878,7 @@
             <a:fld id="{1D8BD707-D9CF-40AE-B4C6-C98DA3205C09}" type="datetimeFigureOut">
               <a:rPr lang="en-US" smtClean="0"/>
               <a:pPr/>
-              <a:t>6/14/2026</a:t>
+              <a:t>6/15/2026</a:t>
             </a:fld>
             <a:endParaRPr lang="en-US"/>
           </a:p>
@@ -5908,7 +6086,7 @@
             <a:fld id="{1D8BD707-D9CF-40AE-B4C6-C98DA3205C09}" type="datetimeFigureOut">
               <a:rPr lang="en-US" smtClean="0"/>
               <a:pPr/>
-              <a:t>6/14/2026</a:t>
+              <a:t>6/15/2026</a:t>
             </a:fld>
             <a:endParaRPr lang="en-US"/>
           </a:p>
@@ -7076,6 +7254,588 @@
 </file>
 
 <file path=ppt/slides/slide11.xml><?xml version="1.0" encoding="utf-8"?>
+<p:sld xmlns:a="http://schemas.openxmlformats.org/drawingml/2006/main" xmlns:r="http://schemas.openxmlformats.org/officeDocument/2006/relationships" xmlns:p="http://schemas.openxmlformats.org/presentationml/2006/main">
+  <p:cSld>
+    <p:spTree>
+      <p:nvGrpSpPr>
+        <p:cNvPr id="1" name="">
+          <a:extLst>
+            <a:ext uri="{FF2B5EF4-FFF2-40B4-BE49-F238E27FC236}">
+              <a16:creationId xmlns:a16="http://schemas.microsoft.com/office/drawing/2014/main" id="{D0E0EBA2-E5E2-3FED-EC92-BD976854F97B}"/>
+            </a:ext>
+          </a:extLst>
+        </p:cNvPr>
+        <p:cNvGrpSpPr/>
+        <p:nvPr/>
+      </p:nvGrpSpPr>
+      <p:grpSpPr>
+        <a:xfrm>
+          <a:off x="0" y="0"/>
+          <a:ext cx="0" cy="0"/>
+          <a:chOff x="0" y="0"/>
+          <a:chExt cx="0" cy="0"/>
+        </a:xfrm>
+      </p:grpSpPr>
+      <p:grpSp>
+        <p:nvGrpSpPr>
+          <p:cNvPr id="2" name="Group 2">
+            <a:extLst>
+              <a:ext uri="{FF2B5EF4-FFF2-40B4-BE49-F238E27FC236}">
+                <a16:creationId xmlns:a16="http://schemas.microsoft.com/office/drawing/2014/main" id="{6FC3CE45-C3EA-6A76-B00B-3C9B4416AF42}"/>
+              </a:ext>
+            </a:extLst>
+          </p:cNvPr>
+          <p:cNvGrpSpPr/>
+          <p:nvPr/>
+        </p:nvGrpSpPr>
+        <p:grpSpPr>
+          <a:xfrm>
+            <a:off x="0" y="0"/>
+            <a:ext cx="18288000" cy="10287000"/>
+            <a:chOff x="0" y="0"/>
+            <a:chExt cx="24384000" cy="13716000"/>
+          </a:xfrm>
+        </p:grpSpPr>
+        <p:sp>
+          <p:nvSpPr>
+            <p:cNvPr id="3" name="Freeform 3" descr="image.png">
+              <a:extLst>
+                <a:ext uri="{FF2B5EF4-FFF2-40B4-BE49-F238E27FC236}">
+                  <a16:creationId xmlns:a16="http://schemas.microsoft.com/office/drawing/2014/main" id="{55199EFE-FC83-24AA-0CB3-CAF05F57A95E}"/>
+                </a:ext>
+              </a:extLst>
+            </p:cNvPr>
+            <p:cNvSpPr/>
+            <p:nvPr/>
+          </p:nvSpPr>
+          <p:spPr>
+            <a:xfrm>
+              <a:off x="0" y="0"/>
+              <a:ext cx="24384000" cy="13716000"/>
+            </a:xfrm>
+            <a:custGeom>
+              <a:avLst/>
+              <a:gdLst/>
+              <a:ahLst/>
+              <a:cxnLst/>
+              <a:rect l="l" t="t" r="r" b="b"/>
+              <a:pathLst>
+                <a:path w="24384000" h="13716000">
+                  <a:moveTo>
+                    <a:pt x="0" y="0"/>
+                  </a:moveTo>
+                  <a:lnTo>
+                    <a:pt x="24384000" y="0"/>
+                  </a:lnTo>
+                  <a:lnTo>
+                    <a:pt x="24384000" y="13716000"/>
+                  </a:lnTo>
+                  <a:lnTo>
+                    <a:pt x="0" y="13716000"/>
+                  </a:lnTo>
+                  <a:lnTo>
+                    <a:pt x="0" y="0"/>
+                  </a:lnTo>
+                  <a:close/>
+                </a:path>
+              </a:pathLst>
+            </a:custGeom>
+            <a:blipFill>
+              <a:blip r:embed="rId3"/>
+              <a:stretch>
+                <a:fillRect/>
+              </a:stretch>
+            </a:blipFill>
+          </p:spPr>
+          <p:txBody>
+            <a:bodyPr/>
+            <a:lstStyle/>
+            <a:p>
+              <a:endParaRPr lang="zh-TW" altLang="en-US"/>
+            </a:p>
+          </p:txBody>
+        </p:sp>
+      </p:grpSp>
+      <p:sp>
+        <p:nvSpPr>
+          <p:cNvPr id="6" name="TextBox 6">
+            <a:extLst>
+              <a:ext uri="{FF2B5EF4-FFF2-40B4-BE49-F238E27FC236}">
+                <a16:creationId xmlns:a16="http://schemas.microsoft.com/office/drawing/2014/main" id="{D28AEFC6-E73D-8F67-03AF-A45400B75261}"/>
+              </a:ext>
+            </a:extLst>
+          </p:cNvPr>
+          <p:cNvSpPr txBox="1"/>
+          <p:nvPr/>
+        </p:nvSpPr>
+        <p:spPr>
+          <a:xfrm>
+            <a:off x="857250" y="1302839"/>
+            <a:ext cx="17402175" cy="692497"/>
+          </a:xfrm>
+          <a:prstGeom prst="rect">
+            <a:avLst/>
+          </a:prstGeom>
+        </p:spPr>
+        <p:txBody>
+          <a:bodyPr lIns="0" tIns="0" rIns="0" bIns="0" rtlCol="0" anchor="t">
+            <a:spAutoFit/>
+          </a:bodyPr>
+          <a:lstStyle/>
+          <a:p>
+            <a:pPr algn="l">
+              <a:lnSpc>
+                <a:spcPts val="5400"/>
+              </a:lnSpc>
+            </a:pPr>
+            <a:r>
+              <a:rPr lang="zh-TW" altLang="en-US" sz="4500" b="1" dirty="0">
+                <a:solidFill>
+                  <a:srgbClr val="1E293B"/>
+                </a:solidFill>
+                <a:latin typeface="Arimo Bold"/>
+                <a:ea typeface="Arimo Bold"/>
+                <a:cs typeface="Arimo Bold"/>
+                <a:sym typeface="Arimo Bold"/>
+              </a:rPr>
+              <a:t>結論</a:t>
+            </a:r>
+            <a:endParaRPr lang="en-US" sz="4500" b="1" dirty="0">
+              <a:solidFill>
+                <a:srgbClr val="1E293B"/>
+              </a:solidFill>
+              <a:latin typeface="Arimo Bold"/>
+              <a:ea typeface="Arimo Bold"/>
+              <a:cs typeface="Arimo Bold"/>
+              <a:sym typeface="Arimo Bold"/>
+            </a:endParaRPr>
+          </a:p>
+        </p:txBody>
+      </p:sp>
+      <p:grpSp>
+        <p:nvGrpSpPr>
+          <p:cNvPr id="7" name="Group 7">
+            <a:extLst>
+              <a:ext uri="{FF2B5EF4-FFF2-40B4-BE49-F238E27FC236}">
+                <a16:creationId xmlns:a16="http://schemas.microsoft.com/office/drawing/2014/main" id="{59ADEBAE-8C74-2094-531A-3B68D2B230A5}"/>
+              </a:ext>
+            </a:extLst>
+          </p:cNvPr>
+          <p:cNvGrpSpPr/>
+          <p:nvPr/>
+        </p:nvGrpSpPr>
+        <p:grpSpPr>
+          <a:xfrm>
+            <a:off x="857250" y="2445839"/>
+            <a:ext cx="16573500" cy="14288"/>
+            <a:chOff x="0" y="0"/>
+            <a:chExt cx="22098000" cy="19050"/>
+          </a:xfrm>
+        </p:grpSpPr>
+        <p:sp>
+          <p:nvSpPr>
+            <p:cNvPr id="8" name="Freeform 8">
+              <a:extLst>
+                <a:ext uri="{FF2B5EF4-FFF2-40B4-BE49-F238E27FC236}">
+                  <a16:creationId xmlns:a16="http://schemas.microsoft.com/office/drawing/2014/main" id="{9166D623-08F4-42E9-619D-E17A9790B330}"/>
+                </a:ext>
+              </a:extLst>
+            </p:cNvPr>
+            <p:cNvSpPr/>
+            <p:nvPr/>
+          </p:nvSpPr>
+          <p:spPr>
+            <a:xfrm>
+              <a:off x="0" y="0"/>
+              <a:ext cx="22098000" cy="19050"/>
+            </a:xfrm>
+            <a:custGeom>
+              <a:avLst/>
+              <a:gdLst/>
+              <a:ahLst/>
+              <a:cxnLst/>
+              <a:rect l="l" t="t" r="r" b="b"/>
+              <a:pathLst>
+                <a:path w="22098000" h="19050">
+                  <a:moveTo>
+                    <a:pt x="0" y="0"/>
+                  </a:moveTo>
+                  <a:lnTo>
+                    <a:pt x="22098000" y="0"/>
+                  </a:lnTo>
+                  <a:lnTo>
+                    <a:pt x="22098000" y="19050"/>
+                  </a:lnTo>
+                  <a:lnTo>
+                    <a:pt x="0" y="19050"/>
+                  </a:lnTo>
+                  <a:close/>
+                </a:path>
+              </a:pathLst>
+            </a:custGeom>
+            <a:solidFill>
+              <a:srgbClr val="E2E8F0"/>
+            </a:solidFill>
+          </p:spPr>
+          <p:txBody>
+            <a:bodyPr/>
+            <a:lstStyle/>
+            <a:p>
+              <a:endParaRPr lang="zh-TW" altLang="en-US"/>
+            </a:p>
+          </p:txBody>
+        </p:sp>
+      </p:grpSp>
+      <p:sp>
+        <p:nvSpPr>
+          <p:cNvPr id="9" name="TextBox 9">
+            <a:extLst>
+              <a:ext uri="{FF2B5EF4-FFF2-40B4-BE49-F238E27FC236}">
+                <a16:creationId xmlns:a16="http://schemas.microsoft.com/office/drawing/2014/main" id="{81F27BE9-F59C-C5C2-9A82-DE155662355E}"/>
+              </a:ext>
+            </a:extLst>
+          </p:cNvPr>
+          <p:cNvSpPr txBox="1"/>
+          <p:nvPr/>
+        </p:nvSpPr>
+        <p:spPr>
+          <a:xfrm>
+            <a:off x="857250" y="3754184"/>
+            <a:ext cx="8326041" cy="458074"/>
+          </a:xfrm>
+          <a:prstGeom prst="rect">
+            <a:avLst/>
+          </a:prstGeom>
+        </p:spPr>
+        <p:txBody>
+          <a:bodyPr lIns="0" tIns="0" rIns="0" bIns="0" rtlCol="0" anchor="t">
+            <a:spAutoFit/>
+          </a:bodyPr>
+          <a:lstStyle/>
+          <a:p>
+            <a:pPr algn="l">
+              <a:lnSpc>
+                <a:spcPts val="3779"/>
+              </a:lnSpc>
+            </a:pPr>
+            <a:r>
+              <a:rPr lang="zh-TW" altLang="en-US" sz="3150" b="1" dirty="0">
+                <a:solidFill>
+                  <a:srgbClr val="1E3A8A"/>
+                </a:solidFill>
+                <a:latin typeface="Arimo Bold"/>
+                <a:ea typeface="Arimo Bold"/>
+                <a:cs typeface="Arimo Bold"/>
+                <a:sym typeface="Arimo Bold"/>
+              </a:rPr>
+              <a:t>長期</a:t>
+            </a:r>
+            <a:r>
+              <a:rPr lang="zh-TW" altLang="en-US" sz="3150" b="1" dirty="0">
+                <a:solidFill>
+                  <a:srgbClr val="1E3A8A"/>
+                </a:solidFill>
+                <a:latin typeface="PMingLiU" panose="02020500000000000000" pitchFamily="18" charset="-120"/>
+                <a:ea typeface="PMingLiU" panose="02020500000000000000" pitchFamily="18" charset="-120"/>
+                <a:cs typeface="Arimo Bold"/>
+                <a:sym typeface="Arimo Bold"/>
+              </a:rPr>
+              <a:t>「</a:t>
+            </a:r>
+            <a:r>
+              <a:rPr lang="zh-TW" altLang="en-US" sz="3150" b="1" dirty="0">
+                <a:solidFill>
+                  <a:srgbClr val="1E3A8A"/>
+                </a:solidFill>
+                <a:latin typeface="Arimo Bold"/>
+                <a:ea typeface="Arimo Bold"/>
+                <a:cs typeface="Arimo Bold"/>
+                <a:sym typeface="Arimo Bold"/>
+              </a:rPr>
+              <a:t>機構化</a:t>
+            </a:r>
+            <a:r>
+              <a:rPr lang="zh-TW" altLang="en-US" sz="3150" b="1" dirty="0">
+                <a:solidFill>
+                  <a:srgbClr val="1E3A8A"/>
+                </a:solidFill>
+                <a:latin typeface="PMingLiU" panose="02020500000000000000" pitchFamily="18" charset="-120"/>
+                <a:ea typeface="PMingLiU" panose="02020500000000000000" pitchFamily="18" charset="-120"/>
+                <a:cs typeface="Arimo Bold"/>
+                <a:sym typeface="Arimo Bold"/>
+              </a:rPr>
+              <a:t>」</a:t>
+            </a:r>
+            <a:r>
+              <a:rPr lang="zh-TW" altLang="en-US" sz="3150" b="1" dirty="0">
+                <a:solidFill>
+                  <a:srgbClr val="1E3A8A"/>
+                </a:solidFill>
+                <a:latin typeface="Arimo Bold"/>
+                <a:ea typeface="Arimo Bold"/>
+                <a:cs typeface="Arimo Bold"/>
+                <a:sym typeface="Arimo Bold"/>
+              </a:rPr>
+              <a:t>假說成立 </a:t>
+            </a:r>
+            <a:endParaRPr lang="en-US" sz="3150" b="1" dirty="0">
+              <a:solidFill>
+                <a:srgbClr val="1E3A8A"/>
+              </a:solidFill>
+              <a:latin typeface="Arimo Bold"/>
+              <a:ea typeface="Arimo Bold"/>
+              <a:cs typeface="Arimo Bold"/>
+              <a:sym typeface="Arimo Bold"/>
+            </a:endParaRPr>
+          </a:p>
+        </p:txBody>
+      </p:sp>
+      <p:sp>
+        <p:nvSpPr>
+          <p:cNvPr id="10" name="TextBox 10">
+            <a:extLst>
+              <a:ext uri="{FF2B5EF4-FFF2-40B4-BE49-F238E27FC236}">
+                <a16:creationId xmlns:a16="http://schemas.microsoft.com/office/drawing/2014/main" id="{25BC6185-3162-C929-F7E2-FF2FB9C1386D}"/>
+              </a:ext>
+            </a:extLst>
+          </p:cNvPr>
+          <p:cNvSpPr txBox="1"/>
+          <p:nvPr/>
+        </p:nvSpPr>
+        <p:spPr>
+          <a:xfrm>
+            <a:off x="857250" y="4487609"/>
+            <a:ext cx="7929562" cy="992964"/>
+          </a:xfrm>
+          <a:prstGeom prst="rect">
+            <a:avLst/>
+          </a:prstGeom>
+        </p:spPr>
+        <p:txBody>
+          <a:bodyPr lIns="0" tIns="0" rIns="0" bIns="0" rtlCol="0" anchor="t">
+            <a:spAutoFit/>
+          </a:bodyPr>
+          <a:lstStyle/>
+          <a:p>
+            <a:pPr>
+              <a:lnSpc>
+                <a:spcPts val="4050"/>
+              </a:lnSpc>
+            </a:pPr>
+            <a:r>
+              <a:rPr lang="zh-TW" altLang="zh-TW" sz="2400" dirty="0"/>
+              <a:t>全週期相關係數高達 </a:t>
+            </a:r>
+            <a:r>
+              <a:rPr lang="en-US" altLang="zh-TW" sz="3600" b="1" dirty="0"/>
+              <a:t>r </a:t>
+            </a:r>
+            <a:r>
+              <a:rPr lang="zh-TW" altLang="zh-TW" sz="2800" b="1" dirty="0"/>
+              <a:t>= 0.87</a:t>
+            </a:r>
+            <a:r>
+              <a:rPr lang="zh-TW" altLang="zh-TW" sz="2400" dirty="0"/>
+              <a:t>，證實現貨 ETF 通過後，數位資產已深度融入傳統美股資金池，呈現高度系統性共振。</a:t>
+            </a:r>
+            <a:endParaRPr lang="en-US" sz="2250" dirty="0">
+              <a:solidFill>
+                <a:srgbClr val="334155"/>
+              </a:solidFill>
+              <a:latin typeface="Arimo"/>
+              <a:ea typeface="Arimo"/>
+              <a:cs typeface="Arimo"/>
+              <a:sym typeface="Arimo"/>
+            </a:endParaRPr>
+          </a:p>
+        </p:txBody>
+      </p:sp>
+      <p:sp>
+        <p:nvSpPr>
+          <p:cNvPr id="13" name="TextBox 9">
+            <a:extLst>
+              <a:ext uri="{FF2B5EF4-FFF2-40B4-BE49-F238E27FC236}">
+                <a16:creationId xmlns:a16="http://schemas.microsoft.com/office/drawing/2014/main" id="{7A28F22F-8EEB-20B5-1A87-87EEF6B353C3}"/>
+              </a:ext>
+            </a:extLst>
+          </p:cNvPr>
+          <p:cNvSpPr txBox="1"/>
+          <p:nvPr/>
+        </p:nvSpPr>
+        <p:spPr>
+          <a:xfrm>
+            <a:off x="813666" y="5845706"/>
+            <a:ext cx="8326041" cy="458074"/>
+          </a:xfrm>
+          <a:prstGeom prst="rect">
+            <a:avLst/>
+          </a:prstGeom>
+        </p:spPr>
+        <p:txBody>
+          <a:bodyPr lIns="0" tIns="0" rIns="0" bIns="0" rtlCol="0" anchor="t">
+            <a:spAutoFit/>
+          </a:bodyPr>
+          <a:lstStyle/>
+          <a:p>
+            <a:pPr>
+              <a:lnSpc>
+                <a:spcPts val="3779"/>
+              </a:lnSpc>
+            </a:pPr>
+            <a:r>
+              <a:rPr lang="zh-TW" altLang="en-US" sz="3150" b="1" dirty="0">
+                <a:solidFill>
+                  <a:srgbClr val="1E3A8A"/>
+                </a:solidFill>
+                <a:latin typeface="Arimo Bold"/>
+                <a:ea typeface="Arimo Bold"/>
+                <a:cs typeface="Arimo Bold"/>
+                <a:sym typeface="Arimo Bold"/>
+              </a:rPr>
+              <a:t>避險屬性具備</a:t>
+            </a:r>
+            <a:r>
+              <a:rPr lang="zh-TW" altLang="en-US" sz="3150" b="1" dirty="0">
+                <a:solidFill>
+                  <a:srgbClr val="1E3A8A"/>
+                </a:solidFill>
+                <a:latin typeface="PMingLiU" panose="02020500000000000000" pitchFamily="18" charset="-120"/>
+                <a:ea typeface="PMingLiU" panose="02020500000000000000" pitchFamily="18" charset="-120"/>
+                <a:cs typeface="Arimo Bold"/>
+                <a:sym typeface="Arimo Bold"/>
+              </a:rPr>
+              <a:t>「</a:t>
+            </a:r>
+            <a:r>
+              <a:rPr lang="zh-TW" altLang="en-US" sz="3150" b="1" dirty="0">
+                <a:solidFill>
+                  <a:srgbClr val="1E3A8A"/>
+                </a:solidFill>
+                <a:latin typeface="Arimo Bold"/>
+                <a:ea typeface="Arimo Bold"/>
+                <a:cs typeface="Arimo Bold"/>
+                <a:sym typeface="Arimo Bold"/>
+              </a:rPr>
+              <a:t>動態非對稱性</a:t>
+            </a:r>
+            <a:r>
+              <a:rPr lang="zh-TW" altLang="en-US" sz="3150" b="1" dirty="0">
+                <a:solidFill>
+                  <a:srgbClr val="1E3A8A"/>
+                </a:solidFill>
+                <a:latin typeface="PMingLiU" panose="02020500000000000000" pitchFamily="18" charset="-120"/>
+                <a:ea typeface="PMingLiU" panose="02020500000000000000" pitchFamily="18" charset="-120"/>
+                <a:cs typeface="Arimo Bold"/>
+                <a:sym typeface="Arimo Bold"/>
+              </a:rPr>
+              <a:t>」</a:t>
+            </a:r>
+            <a:endParaRPr lang="en-US" sz="3150" b="1" dirty="0">
+              <a:solidFill>
+                <a:srgbClr val="1E3A8A"/>
+              </a:solidFill>
+              <a:latin typeface="Arimo Bold"/>
+              <a:ea typeface="Arimo Bold"/>
+              <a:cs typeface="Arimo Bold"/>
+              <a:sym typeface="Arimo Bold"/>
+            </a:endParaRPr>
+          </a:p>
+        </p:txBody>
+      </p:sp>
+      <p:sp>
+        <p:nvSpPr>
+          <p:cNvPr id="14" name="TextBox 10">
+            <a:extLst>
+              <a:ext uri="{FF2B5EF4-FFF2-40B4-BE49-F238E27FC236}">
+                <a16:creationId xmlns:a16="http://schemas.microsoft.com/office/drawing/2014/main" id="{44FFCA83-24C8-557A-77DB-C2CE471C63D2}"/>
+              </a:ext>
+            </a:extLst>
+          </p:cNvPr>
+          <p:cNvSpPr txBox="1"/>
+          <p:nvPr/>
+        </p:nvSpPr>
+        <p:spPr>
+          <a:xfrm>
+            <a:off x="814739" y="6489349"/>
+            <a:ext cx="7929562" cy="1518749"/>
+          </a:xfrm>
+          <a:prstGeom prst="rect">
+            <a:avLst/>
+          </a:prstGeom>
+        </p:spPr>
+        <p:txBody>
+          <a:bodyPr lIns="0" tIns="0" rIns="0" bIns="0" rtlCol="0" anchor="t">
+            <a:spAutoFit/>
+          </a:bodyPr>
+          <a:lstStyle/>
+          <a:p>
+            <a:pPr>
+              <a:lnSpc>
+                <a:spcPts val="4050"/>
+              </a:lnSpc>
+            </a:pPr>
+            <a:r>
+              <a:rPr lang="zh-TW" altLang="zh-TW" sz="2400" dirty="0"/>
+              <a:t>2023年秋季的</a:t>
+            </a:r>
+            <a:r>
+              <a:rPr lang="zh-TW" altLang="zh-TW" sz="3600" dirty="0"/>
+              <a:t> </a:t>
+            </a:r>
+            <a:r>
+              <a:rPr lang="en-US" altLang="zh-TW" sz="3600" b="1" dirty="0"/>
+              <a:t>r </a:t>
+            </a:r>
+            <a:r>
+              <a:rPr lang="zh-TW" altLang="zh-TW" sz="2800" b="1" dirty="0"/>
+              <a:t>= </a:t>
+            </a:r>
+            <a:r>
+              <a:rPr lang="en-US" altLang="zh-TW" sz="2800" b="1" dirty="0"/>
+              <a:t>-</a:t>
+            </a:r>
+            <a:r>
+              <a:rPr lang="zh-TW" altLang="zh-TW" sz="2800" b="1" dirty="0"/>
+              <a:t>0.</a:t>
+            </a:r>
+            <a:r>
+              <a:rPr lang="en-US" altLang="zh-TW" sz="2800" b="1" dirty="0"/>
+              <a:t>75</a:t>
+            </a:r>
+            <a:r>
+              <a:rPr lang="zh-TW" altLang="en-US" sz="2800" b="1" dirty="0"/>
+              <a:t> </a:t>
+            </a:r>
+            <a:r>
+              <a:rPr lang="zh-TW" altLang="zh-TW" sz="2400" dirty="0"/>
+              <a:t>實證顯示，在傳統金融信用緊縮且數位資產迎來產業利多時，兩者會迅速觸發脫鉤，發揮獨立避險潛力。</a:t>
+            </a:r>
+            <a:endParaRPr lang="en-US" sz="2250" dirty="0">
+              <a:solidFill>
+                <a:srgbClr val="334155"/>
+              </a:solidFill>
+              <a:latin typeface="Arimo"/>
+              <a:ea typeface="Arimo"/>
+              <a:cs typeface="Arimo"/>
+              <a:sym typeface="Arimo"/>
+            </a:endParaRPr>
+          </a:p>
+        </p:txBody>
+      </p:sp>
+    </p:spTree>
+    <p:extLst>
+      <p:ext uri="{BB962C8B-B14F-4D97-AF65-F5344CB8AC3E}">
+        <p14:creationId xmlns:p14="http://schemas.microsoft.com/office/powerpoint/2010/main" val="11952152"/>
+      </p:ext>
+    </p:extLst>
+  </p:cSld>
+  <p:clrMapOvr>
+    <a:masterClrMapping/>
+  </p:clrMapOvr>
+</p:sld>
+</file>
+
+<file path=ppt/slides/slide12.xml><?xml version="1.0" encoding="utf-8"?>
 <p:sld xmlns:a="http://schemas.openxmlformats.org/drawingml/2006/main" xmlns:r="http://schemas.openxmlformats.org/officeDocument/2006/relationships" xmlns:p="http://schemas.openxmlformats.org/presentationml/2006/main">
   <p:cSld>
     <p:spTree>
@@ -9340,240 +10100,6 @@
 </p:sld>
 </file>
 
-<file path=ppt/slides/slide12.xml><?xml version="1.0" encoding="utf-8"?>
-<p:sld xmlns:a="http://schemas.openxmlformats.org/drawingml/2006/main" xmlns:r="http://schemas.openxmlformats.org/officeDocument/2006/relationships" xmlns:p="http://schemas.openxmlformats.org/presentationml/2006/main">
-  <p:cSld>
-    <p:spTree>
-      <p:nvGrpSpPr>
-        <p:cNvPr id="1" name=""/>
-        <p:cNvGrpSpPr/>
-        <p:nvPr/>
-      </p:nvGrpSpPr>
-      <p:grpSpPr>
-        <a:xfrm>
-          <a:off x="0" y="0"/>
-          <a:ext cx="0" cy="0"/>
-          <a:chOff x="0" y="0"/>
-          <a:chExt cx="0" cy="0"/>
-        </a:xfrm>
-      </p:grpSpPr>
-      <p:grpSp>
-        <p:nvGrpSpPr>
-          <p:cNvPr id="2" name="Group 2"/>
-          <p:cNvGrpSpPr/>
-          <p:nvPr/>
-        </p:nvGrpSpPr>
-        <p:grpSpPr>
-          <a:xfrm>
-            <a:off x="0" y="0"/>
-            <a:ext cx="18288000" cy="10287000"/>
-            <a:chOff x="0" y="0"/>
-            <a:chExt cx="24384000" cy="13716000"/>
-          </a:xfrm>
-        </p:grpSpPr>
-        <p:sp>
-          <p:nvSpPr>
-            <p:cNvPr id="3" name="Freeform 3" descr="image.png"/>
-            <p:cNvSpPr/>
-            <p:nvPr/>
-          </p:nvSpPr>
-          <p:spPr>
-            <a:xfrm>
-              <a:off x="0" y="0"/>
-              <a:ext cx="24384000" cy="13716000"/>
-            </a:xfrm>
-            <a:custGeom>
-              <a:avLst/>
-              <a:gdLst/>
-              <a:ahLst/>
-              <a:cxnLst/>
-              <a:rect l="l" t="t" r="r" b="b"/>
-              <a:pathLst>
-                <a:path w="24384000" h="13716000">
-                  <a:moveTo>
-                    <a:pt x="0" y="0"/>
-                  </a:moveTo>
-                  <a:lnTo>
-                    <a:pt x="24384000" y="0"/>
-                  </a:lnTo>
-                  <a:lnTo>
-                    <a:pt x="24384000" y="13716000"/>
-                  </a:lnTo>
-                  <a:lnTo>
-                    <a:pt x="0" y="13716000"/>
-                  </a:lnTo>
-                  <a:lnTo>
-                    <a:pt x="0" y="0"/>
-                  </a:lnTo>
-                  <a:close/>
-                </a:path>
-              </a:pathLst>
-            </a:custGeom>
-            <a:blipFill>
-              <a:blip r:embed="rId3"/>
-              <a:stretch>
-                <a:fillRect/>
-              </a:stretch>
-            </a:blipFill>
-          </p:spPr>
-          <p:txBody>
-            <a:bodyPr/>
-            <a:lstStyle/>
-            <a:p>
-              <a:endParaRPr lang="zh-TW" altLang="en-US"/>
-            </a:p>
-          </p:txBody>
-        </p:sp>
-      </p:grpSp>
-      <p:sp>
-        <p:nvSpPr>
-          <p:cNvPr id="4" name="TextBox 4"/>
-          <p:cNvSpPr txBox="1"/>
-          <p:nvPr/>
-        </p:nvSpPr>
-        <p:spPr>
-          <a:xfrm>
-            <a:off x="6400800" y="3396404"/>
-            <a:ext cx="5757510" cy="1384995"/>
-          </a:xfrm>
-          <a:prstGeom prst="rect">
-            <a:avLst/>
-          </a:prstGeom>
-        </p:spPr>
-        <p:txBody>
-          <a:bodyPr wrap="square" lIns="0" tIns="0" rIns="0" bIns="0" rtlCol="0" anchor="t">
-            <a:spAutoFit/>
-          </a:bodyPr>
-          <a:lstStyle/>
-          <a:p>
-            <a:pPr algn="ctr">
-              <a:lnSpc>
-                <a:spcPts val="10800"/>
-              </a:lnSpc>
-            </a:pPr>
-            <a:r>
-              <a:rPr lang="zh-TW" altLang="en-US" sz="9000" b="1">
-                <a:solidFill>
-                  <a:srgbClr val="1E293B"/>
-                </a:solidFill>
-                <a:latin typeface="Arimo Bold"/>
-                <a:ea typeface="Arimo Bold"/>
-                <a:cs typeface="Arimo Bold"/>
-                <a:sym typeface="Arimo Bold"/>
-              </a:rPr>
-              <a:t>報告結束</a:t>
-            </a:r>
-            <a:endParaRPr lang="en-US" sz="9000" b="1" dirty="0">
-              <a:solidFill>
-                <a:srgbClr val="1E293B"/>
-              </a:solidFill>
-              <a:latin typeface="Arimo Bold"/>
-              <a:ea typeface="Arimo Bold"/>
-              <a:cs typeface="Arimo Bold"/>
-              <a:sym typeface="Arimo Bold"/>
-            </a:endParaRPr>
-          </a:p>
-        </p:txBody>
-      </p:sp>
-      <p:sp>
-        <p:nvSpPr>
-          <p:cNvPr id="5" name="TextBox 5"/>
-          <p:cNvSpPr txBox="1"/>
-          <p:nvPr/>
-        </p:nvSpPr>
-        <p:spPr>
-          <a:xfrm>
-            <a:off x="6743700" y="5231902"/>
-            <a:ext cx="4800600" cy="550664"/>
-          </a:xfrm>
-          <a:prstGeom prst="rect">
-            <a:avLst/>
-          </a:prstGeom>
-        </p:spPr>
-        <p:txBody>
-          <a:bodyPr lIns="0" tIns="0" rIns="0" bIns="0" rtlCol="0" anchor="t">
-            <a:spAutoFit/>
-          </a:bodyPr>
-          <a:lstStyle/>
-          <a:p>
-            <a:pPr algn="ctr">
-              <a:lnSpc>
-                <a:spcPts val="4860"/>
-              </a:lnSpc>
-            </a:pPr>
-            <a:r>
-              <a:rPr lang="en-US" sz="2700" dirty="0" err="1">
-                <a:solidFill>
-                  <a:srgbClr val="64748B"/>
-                </a:solidFill>
-                <a:latin typeface="Arimo"/>
-                <a:ea typeface="Arimo"/>
-                <a:cs typeface="Arimo"/>
-                <a:sym typeface="Arimo"/>
-              </a:rPr>
-              <a:t>感謝各位的聆聽</a:t>
-            </a:r>
-            <a:endParaRPr lang="en-US" sz="2700" dirty="0">
-              <a:solidFill>
-                <a:srgbClr val="64748B"/>
-              </a:solidFill>
-              <a:latin typeface="Arimo"/>
-              <a:ea typeface="Arimo"/>
-              <a:cs typeface="Arimo"/>
-              <a:sym typeface="Arimo"/>
-            </a:endParaRPr>
-          </a:p>
-        </p:txBody>
-      </p:sp>
-      <p:sp>
-        <p:nvSpPr>
-          <p:cNvPr id="6" name="TextBox 6"/>
-          <p:cNvSpPr txBox="1"/>
-          <p:nvPr/>
-        </p:nvSpPr>
-        <p:spPr>
-          <a:xfrm>
-            <a:off x="4907756" y="6462116"/>
-            <a:ext cx="8472488" cy="571500"/>
-          </a:xfrm>
-          <a:prstGeom prst="rect">
-            <a:avLst/>
-          </a:prstGeom>
-        </p:spPr>
-        <p:txBody>
-          <a:bodyPr lIns="0" tIns="0" rIns="0" bIns="0" rtlCol="0" anchor="t">
-            <a:spAutoFit/>
-          </a:bodyPr>
-          <a:lstStyle/>
-          <a:p>
-            <a:pPr algn="ctr">
-              <a:lnSpc>
-                <a:spcPts val="4050"/>
-              </a:lnSpc>
-            </a:pPr>
-            <a:r>
-              <a:rPr lang="en-US" sz="2250" dirty="0">
-                <a:solidFill>
-                  <a:srgbClr val="334155"/>
-                </a:solidFill>
-                <a:latin typeface="Arimo"/>
-                <a:ea typeface="Arimo"/>
-                <a:cs typeface="Arimo"/>
-                <a:sym typeface="Arimo"/>
-              </a:rPr>
-              <a:t>112111207 陳品霖 | Power BI Financial Analytics</a:t>
-            </a:r>
-          </a:p>
-        </p:txBody>
-      </p:sp>
-    </p:spTree>
-  </p:cSld>
-  <p:clrMapOvr>
-    <a:masterClrMapping/>
-  </p:clrMapOvr>
-</p:sld>
-</file>
-
 <file path=ppt/slides/slide13.xml><?xml version="1.0" encoding="utf-8"?>
 <p:sld xmlns:a="http://schemas.openxmlformats.org/drawingml/2006/main" xmlns:r="http://schemas.openxmlformats.org/officeDocument/2006/relationships" xmlns:p="http://schemas.openxmlformats.org/presentationml/2006/main">
   <p:cSld>
@@ -9667,26 +10193,26 @@
         </p:nvSpPr>
         <p:spPr>
           <a:xfrm>
-            <a:off x="857250" y="1302839"/>
-            <a:ext cx="17402175" cy="685800"/>
-          </a:xfrm>
-          <a:prstGeom prst="rect">
-            <a:avLst/>
-          </a:prstGeom>
-        </p:spPr>
-        <p:txBody>
-          <a:bodyPr lIns="0" tIns="0" rIns="0" bIns="0" rtlCol="0" anchor="t">
+            <a:off x="6400800" y="3396404"/>
+            <a:ext cx="5757510" cy="1384995"/>
+          </a:xfrm>
+          <a:prstGeom prst="rect">
+            <a:avLst/>
+          </a:prstGeom>
+        </p:spPr>
+        <p:txBody>
+          <a:bodyPr wrap="square" lIns="0" tIns="0" rIns="0" bIns="0" rtlCol="0" anchor="t">
             <a:spAutoFit/>
           </a:bodyPr>
           <a:lstStyle/>
           <a:p>
-            <a:pPr algn="l">
+            <a:pPr algn="ctr">
               <a:lnSpc>
-                <a:spcPts val="5400"/>
+                <a:spcPts val="10800"/>
               </a:lnSpc>
             </a:pPr>
             <a:r>
-              <a:rPr lang="en-US" sz="4500" b="1">
+              <a:rPr lang="zh-TW" altLang="en-US" sz="9000" b="1">
                 <a:solidFill>
                   <a:srgbClr val="1E293B"/>
                 </a:solidFill>
@@ -9695,399 +10221,30 @@
                 <a:cs typeface="Arimo Bold"/>
                 <a:sym typeface="Arimo Bold"/>
               </a:rPr>
-              <a:t>Image Sources</a:t>
-            </a:r>
-          </a:p>
-        </p:txBody>
-      </p:sp>
-      <p:grpSp>
-        <p:nvGrpSpPr>
-          <p:cNvPr id="5" name="Group 5"/>
-          <p:cNvGrpSpPr/>
-          <p:nvPr/>
-        </p:nvGrpSpPr>
-        <p:grpSpPr>
-          <a:xfrm>
-            <a:off x="857250" y="2260102"/>
-            <a:ext cx="16573500" cy="14288"/>
-            <a:chOff x="0" y="0"/>
-            <a:chExt cx="22098000" cy="19050"/>
-          </a:xfrm>
-        </p:grpSpPr>
-        <p:sp>
-          <p:nvSpPr>
-            <p:cNvPr id="6" name="Freeform 6"/>
-            <p:cNvSpPr/>
-            <p:nvPr/>
-          </p:nvSpPr>
-          <p:spPr>
-            <a:xfrm>
-              <a:off x="0" y="0"/>
-              <a:ext cx="22098000" cy="19050"/>
-            </a:xfrm>
-            <a:custGeom>
-              <a:avLst/>
-              <a:gdLst/>
-              <a:ahLst/>
-              <a:cxnLst/>
-              <a:rect l="l" t="t" r="r" b="b"/>
-              <a:pathLst>
-                <a:path w="22098000" h="19050">
-                  <a:moveTo>
-                    <a:pt x="0" y="0"/>
-                  </a:moveTo>
-                  <a:lnTo>
-                    <a:pt x="22098000" y="0"/>
-                  </a:lnTo>
-                  <a:lnTo>
-                    <a:pt x="22098000" y="19050"/>
-                  </a:lnTo>
-                  <a:lnTo>
-                    <a:pt x="0" y="19050"/>
-                  </a:lnTo>
-                  <a:close/>
-                </a:path>
-              </a:pathLst>
-            </a:custGeom>
-            <a:solidFill>
-              <a:srgbClr val="E2E8F0"/>
-            </a:solidFill>
-          </p:spPr>
-          <p:txBody>
-            <a:bodyPr/>
-            <a:lstStyle/>
-            <a:p>
-              <a:endParaRPr lang="zh-TW" altLang="en-US"/>
-            </a:p>
-          </p:txBody>
-        </p:sp>
-      </p:grpSp>
-      <p:grpSp>
-        <p:nvGrpSpPr>
-          <p:cNvPr id="7" name="Group 7"/>
-          <p:cNvGrpSpPr/>
-          <p:nvPr/>
-        </p:nvGrpSpPr>
-        <p:grpSpPr>
-          <a:xfrm>
-            <a:off x="857250" y="5423449"/>
-            <a:ext cx="16573500" cy="14288"/>
-            <a:chOff x="0" y="0"/>
-            <a:chExt cx="22098000" cy="19050"/>
-          </a:xfrm>
-        </p:grpSpPr>
-        <p:sp>
-          <p:nvSpPr>
-            <p:cNvPr id="8" name="Freeform 8"/>
-            <p:cNvSpPr/>
-            <p:nvPr/>
-          </p:nvSpPr>
-          <p:spPr>
-            <a:xfrm>
-              <a:off x="0" y="0"/>
-              <a:ext cx="22098000" cy="19050"/>
-            </a:xfrm>
-            <a:custGeom>
-              <a:avLst/>
-              <a:gdLst/>
-              <a:ahLst/>
-              <a:cxnLst/>
-              <a:rect l="l" t="t" r="r" b="b"/>
-              <a:pathLst>
-                <a:path w="22098000" h="19050">
-                  <a:moveTo>
-                    <a:pt x="0" y="0"/>
-                  </a:moveTo>
-                  <a:lnTo>
-                    <a:pt x="22098000" y="0"/>
-                  </a:lnTo>
-                  <a:lnTo>
-                    <a:pt x="22098000" y="19050"/>
-                  </a:lnTo>
-                  <a:lnTo>
-                    <a:pt x="0" y="19050"/>
-                  </a:lnTo>
-                  <a:close/>
-                </a:path>
-              </a:pathLst>
-            </a:custGeom>
-            <a:solidFill>
-              <a:srgbClr val="757575"/>
-            </a:solidFill>
-          </p:spPr>
-          <p:txBody>
-            <a:bodyPr/>
-            <a:lstStyle/>
-            <a:p>
-              <a:endParaRPr lang="zh-TW" altLang="en-US"/>
-            </a:p>
-          </p:txBody>
-        </p:sp>
-      </p:grpSp>
-      <p:grpSp>
-        <p:nvGrpSpPr>
-          <p:cNvPr id="9" name="Group 9"/>
-          <p:cNvGrpSpPr/>
-          <p:nvPr/>
-        </p:nvGrpSpPr>
-        <p:grpSpPr>
-          <a:xfrm>
-            <a:off x="857250" y="5423449"/>
-            <a:ext cx="16573500" cy="14288"/>
-            <a:chOff x="0" y="0"/>
-            <a:chExt cx="22098000" cy="19050"/>
-          </a:xfrm>
-        </p:grpSpPr>
-        <p:sp>
-          <p:nvSpPr>
-            <p:cNvPr id="10" name="Freeform 10"/>
-            <p:cNvSpPr/>
-            <p:nvPr/>
-          </p:nvSpPr>
-          <p:spPr>
-            <a:xfrm>
-              <a:off x="0" y="0"/>
-              <a:ext cx="22098000" cy="19050"/>
-            </a:xfrm>
-            <a:custGeom>
-              <a:avLst/>
-              <a:gdLst/>
-              <a:ahLst/>
-              <a:cxnLst/>
-              <a:rect l="l" t="t" r="r" b="b"/>
-              <a:pathLst>
-                <a:path w="22098000" h="19050">
-                  <a:moveTo>
-                    <a:pt x="0" y="0"/>
-                  </a:moveTo>
-                  <a:lnTo>
-                    <a:pt x="22098000" y="0"/>
-                  </a:lnTo>
-                  <a:lnTo>
-                    <a:pt x="22098000" y="19050"/>
-                  </a:lnTo>
-                  <a:lnTo>
-                    <a:pt x="0" y="19050"/>
-                  </a:lnTo>
-                  <a:close/>
-                </a:path>
-              </a:pathLst>
-            </a:custGeom>
-            <a:solidFill>
-              <a:srgbClr val="757575"/>
-            </a:solidFill>
-          </p:spPr>
-          <p:txBody>
-            <a:bodyPr/>
-            <a:lstStyle/>
-            <a:p>
-              <a:endParaRPr lang="zh-TW" altLang="en-US"/>
-            </a:p>
-          </p:txBody>
-        </p:sp>
-      </p:grpSp>
-      <p:grpSp>
-        <p:nvGrpSpPr>
-          <p:cNvPr id="11" name="Group 11"/>
-          <p:cNvGrpSpPr/>
-          <p:nvPr/>
-        </p:nvGrpSpPr>
-        <p:grpSpPr>
-          <a:xfrm>
-            <a:off x="857250" y="6580737"/>
-            <a:ext cx="16573500" cy="14288"/>
-            <a:chOff x="0" y="0"/>
-            <a:chExt cx="22098000" cy="19050"/>
-          </a:xfrm>
-        </p:grpSpPr>
-        <p:sp>
-          <p:nvSpPr>
-            <p:cNvPr id="12" name="Freeform 12"/>
-            <p:cNvSpPr/>
-            <p:nvPr/>
-          </p:nvSpPr>
-          <p:spPr>
-            <a:xfrm>
-              <a:off x="0" y="0"/>
-              <a:ext cx="22098000" cy="19050"/>
-            </a:xfrm>
-            <a:custGeom>
-              <a:avLst/>
-              <a:gdLst/>
-              <a:ahLst/>
-              <a:cxnLst/>
-              <a:rect l="l" t="t" r="r" b="b"/>
-              <a:pathLst>
-                <a:path w="22098000" h="19050">
-                  <a:moveTo>
-                    <a:pt x="0" y="0"/>
-                  </a:moveTo>
-                  <a:lnTo>
-                    <a:pt x="22098000" y="0"/>
-                  </a:lnTo>
-                  <a:lnTo>
-                    <a:pt x="22098000" y="19050"/>
-                  </a:lnTo>
-                  <a:lnTo>
-                    <a:pt x="0" y="19050"/>
-                  </a:lnTo>
-                  <a:close/>
-                </a:path>
-              </a:pathLst>
-            </a:custGeom>
-            <a:solidFill>
-              <a:srgbClr val="757575"/>
-            </a:solidFill>
-          </p:spPr>
-          <p:txBody>
-            <a:bodyPr/>
-            <a:lstStyle/>
-            <a:p>
-              <a:endParaRPr lang="zh-TW" altLang="en-US"/>
-            </a:p>
-          </p:txBody>
-        </p:sp>
-      </p:grpSp>
-      <p:grpSp>
-        <p:nvGrpSpPr>
-          <p:cNvPr id="13" name="Group 13"/>
-          <p:cNvGrpSpPr/>
-          <p:nvPr/>
-        </p:nvGrpSpPr>
-        <p:grpSpPr>
-          <a:xfrm>
-            <a:off x="857250" y="6580737"/>
-            <a:ext cx="16573500" cy="14288"/>
-            <a:chOff x="0" y="0"/>
-            <a:chExt cx="22098000" cy="19050"/>
-          </a:xfrm>
-        </p:grpSpPr>
-        <p:sp>
-          <p:nvSpPr>
-            <p:cNvPr id="14" name="Freeform 14"/>
-            <p:cNvSpPr/>
-            <p:nvPr/>
-          </p:nvSpPr>
-          <p:spPr>
-            <a:xfrm>
-              <a:off x="0" y="0"/>
-              <a:ext cx="22098000" cy="19050"/>
-            </a:xfrm>
-            <a:custGeom>
-              <a:avLst/>
-              <a:gdLst/>
-              <a:ahLst/>
-              <a:cxnLst/>
-              <a:rect l="l" t="t" r="r" b="b"/>
-              <a:pathLst>
-                <a:path w="22098000" h="19050">
-                  <a:moveTo>
-                    <a:pt x="0" y="0"/>
-                  </a:moveTo>
-                  <a:lnTo>
-                    <a:pt x="22098000" y="0"/>
-                  </a:lnTo>
-                  <a:lnTo>
-                    <a:pt x="22098000" y="19050"/>
-                  </a:lnTo>
-                  <a:lnTo>
-                    <a:pt x="0" y="19050"/>
-                  </a:lnTo>
-                  <a:close/>
-                </a:path>
-              </a:pathLst>
-            </a:custGeom>
-            <a:solidFill>
-              <a:srgbClr val="757575"/>
-            </a:solidFill>
-          </p:spPr>
-          <p:txBody>
-            <a:bodyPr/>
-            <a:lstStyle/>
-            <a:p>
-              <a:endParaRPr lang="zh-TW" altLang="en-US"/>
-            </a:p>
-          </p:txBody>
-        </p:sp>
-      </p:grpSp>
-      <p:grpSp>
-        <p:nvGrpSpPr>
-          <p:cNvPr id="15" name="Group 15"/>
-          <p:cNvGrpSpPr/>
-          <p:nvPr/>
-        </p:nvGrpSpPr>
-        <p:grpSpPr>
-          <a:xfrm>
-            <a:off x="857250" y="4494762"/>
-            <a:ext cx="1285875" cy="714375"/>
-            <a:chOff x="0" y="0"/>
-            <a:chExt cx="1714500" cy="952500"/>
-          </a:xfrm>
-        </p:grpSpPr>
-        <p:sp>
-          <p:nvSpPr>
-            <p:cNvPr id="16" name="Freeform 16" descr="image.png"/>
-            <p:cNvSpPr/>
-            <p:nvPr/>
-          </p:nvSpPr>
-          <p:spPr>
-            <a:xfrm>
-              <a:off x="0" y="0"/>
-              <a:ext cx="1714500" cy="952500"/>
-            </a:xfrm>
-            <a:custGeom>
-              <a:avLst/>
-              <a:gdLst/>
-              <a:ahLst/>
-              <a:cxnLst/>
-              <a:rect l="l" t="t" r="r" b="b"/>
-              <a:pathLst>
-                <a:path w="1714500" h="952500">
-                  <a:moveTo>
-                    <a:pt x="0" y="0"/>
-                  </a:moveTo>
-                  <a:lnTo>
-                    <a:pt x="1714500" y="0"/>
-                  </a:lnTo>
-                  <a:lnTo>
-                    <a:pt x="1714500" y="952500"/>
-                  </a:lnTo>
-                  <a:lnTo>
-                    <a:pt x="0" y="952500"/>
-                  </a:lnTo>
-                  <a:lnTo>
-                    <a:pt x="0" y="0"/>
-                  </a:lnTo>
-                  <a:close/>
-                </a:path>
-              </a:pathLst>
-            </a:custGeom>
-            <a:blipFill>
-              <a:blip r:embed="rId4"/>
-              <a:stretch>
-                <a:fillRect b="-2000"/>
-              </a:stretch>
-            </a:blipFill>
-          </p:spPr>
-          <p:txBody>
-            <a:bodyPr/>
-            <a:lstStyle/>
-            <a:p>
-              <a:endParaRPr lang="zh-TW" altLang="en-US"/>
-            </a:p>
-          </p:txBody>
-        </p:sp>
-      </p:grpSp>
-      <p:sp>
-        <p:nvSpPr>
-          <p:cNvPr id="17" name="TextBox 17"/>
+              <a:t>報告結束</a:t>
+            </a:r>
+            <a:endParaRPr lang="en-US" sz="9000" b="1" dirty="0">
+              <a:solidFill>
+                <a:srgbClr val="1E293B"/>
+              </a:solidFill>
+              <a:latin typeface="Arimo Bold"/>
+              <a:ea typeface="Arimo Bold"/>
+              <a:cs typeface="Arimo Bold"/>
+              <a:sym typeface="Arimo Bold"/>
+            </a:endParaRPr>
+          </a:p>
+        </p:txBody>
+      </p:sp>
+      <p:sp>
+        <p:nvSpPr>
+          <p:cNvPr id="5" name="TextBox 5"/>
           <p:cNvSpPr txBox="1"/>
           <p:nvPr/>
         </p:nvSpPr>
         <p:spPr>
           <a:xfrm>
-            <a:off x="2500312" y="4410227"/>
-            <a:ext cx="14930438" cy="373856"/>
+            <a:off x="6743700" y="5231902"/>
+            <a:ext cx="4800600" cy="550664"/>
           </a:xfrm>
           <a:prstGeom prst="rect">
             <a:avLst/>
@@ -10099,13 +10256,63 @@
           </a:bodyPr>
           <a:lstStyle/>
           <a:p>
-            <a:pPr algn="l">
+            <a:pPr algn="ctr">
               <a:lnSpc>
-                <a:spcPts val="2631"/>
+                <a:spcPts val="4860"/>
               </a:lnSpc>
             </a:pPr>
             <a:r>
-              <a:rPr lang="en-US" sz="1462">
+              <a:rPr lang="en-US" sz="2700" dirty="0" err="1">
+                <a:solidFill>
+                  <a:srgbClr val="64748B"/>
+                </a:solidFill>
+                <a:latin typeface="Arimo"/>
+                <a:ea typeface="Arimo"/>
+                <a:cs typeface="Arimo"/>
+                <a:sym typeface="Arimo"/>
+              </a:rPr>
+              <a:t>感謝各位的聆聽</a:t>
+            </a:r>
+            <a:endParaRPr lang="en-US" sz="2700" dirty="0">
+              <a:solidFill>
+                <a:srgbClr val="64748B"/>
+              </a:solidFill>
+              <a:latin typeface="Arimo"/>
+              <a:ea typeface="Arimo"/>
+              <a:cs typeface="Arimo"/>
+              <a:sym typeface="Arimo"/>
+            </a:endParaRPr>
+          </a:p>
+        </p:txBody>
+      </p:sp>
+      <p:sp>
+        <p:nvSpPr>
+          <p:cNvPr id="6" name="TextBox 6"/>
+          <p:cNvSpPr txBox="1"/>
+          <p:nvPr/>
+        </p:nvSpPr>
+        <p:spPr>
+          <a:xfrm>
+            <a:off x="4907756" y="6462116"/>
+            <a:ext cx="8472488" cy="571500"/>
+          </a:xfrm>
+          <a:prstGeom prst="rect">
+            <a:avLst/>
+          </a:prstGeom>
+        </p:spPr>
+        <p:txBody>
+          <a:bodyPr lIns="0" tIns="0" rIns="0" bIns="0" rtlCol="0" anchor="t">
+            <a:spAutoFit/>
+          </a:bodyPr>
+          <a:lstStyle/>
+          <a:p>
+            <a:pPr algn="ctr">
+              <a:lnSpc>
+                <a:spcPts val="4050"/>
+              </a:lnSpc>
+            </a:pPr>
+            <a:r>
+              <a:rPr lang="en-US" sz="2250" dirty="0">
                 <a:solidFill>
                   <a:srgbClr val="334155"/>
                 </a:solidFill>
@@ -10114,384 +10321,7 @@
                 <a:cs typeface="Arimo"/>
                 <a:sym typeface="Arimo"/>
               </a:rPr>
-              <a:t>https://d2r1j6ikuh5sl8.cloudfront.net/blog-images/unlocking-market-insights-discover-the-best-android-stock-widget-in-2025-xhx5Im5s-mSB.webp</a:t>
-            </a:r>
-          </a:p>
-        </p:txBody>
-      </p:sp>
-      <p:sp>
-        <p:nvSpPr>
-          <p:cNvPr id="18" name="TextBox 18"/>
-          <p:cNvSpPr txBox="1"/>
-          <p:nvPr/>
-        </p:nvSpPr>
-        <p:spPr>
-          <a:xfrm>
-            <a:off x="2500312" y="4731696"/>
-            <a:ext cx="14930438" cy="466725"/>
-          </a:xfrm>
-          <a:prstGeom prst="rect">
-            <a:avLst/>
-          </a:prstGeom>
-        </p:spPr>
-        <p:txBody>
-          <a:bodyPr lIns="0" tIns="0" rIns="0" bIns="0" rtlCol="0" anchor="t">
-            <a:spAutoFit/>
-          </a:bodyPr>
-          <a:lstStyle/>
-          <a:p>
-            <a:pPr algn="l">
-              <a:lnSpc>
-                <a:spcPts val="3240"/>
-              </a:lnSpc>
-            </a:pPr>
-            <a:r>
-              <a:rPr lang="en-US" sz="1800">
-                <a:solidFill>
-                  <a:srgbClr val="334155"/>
-                </a:solidFill>
-                <a:latin typeface="Arimo"/>
-                <a:ea typeface="Arimo"/>
-                <a:cs typeface="Arimo"/>
-                <a:sym typeface="Arimo"/>
-              </a:rPr>
-              <a:t>Source: </a:t>
-            </a:r>
-            <a:r>
-              <a:rPr lang="en-US" sz="1800">
-                <a:solidFill>
-                  <a:srgbClr val="4F46E5"/>
-                </a:solidFill>
-                <a:latin typeface="Arimo"/>
-                <a:ea typeface="Arimo"/>
-                <a:cs typeface="Arimo"/>
-                <a:sym typeface="Arimo"/>
-              </a:rPr>
-              <a:t>widgetopia.io</a:t>
-            </a:r>
-          </a:p>
-        </p:txBody>
-      </p:sp>
-      <p:grpSp>
-        <p:nvGrpSpPr>
-          <p:cNvPr id="19" name="Group 19"/>
-          <p:cNvGrpSpPr/>
-          <p:nvPr/>
-        </p:nvGrpSpPr>
-        <p:grpSpPr>
-          <a:xfrm>
-            <a:off x="857250" y="5652049"/>
-            <a:ext cx="1285875" cy="714375"/>
-            <a:chOff x="0" y="0"/>
-            <a:chExt cx="1714500" cy="952500"/>
-          </a:xfrm>
-        </p:grpSpPr>
-        <p:sp>
-          <p:nvSpPr>
-            <p:cNvPr id="20" name="Freeform 20" descr="image.png"/>
-            <p:cNvSpPr/>
-            <p:nvPr/>
-          </p:nvSpPr>
-          <p:spPr>
-            <a:xfrm>
-              <a:off x="0" y="0"/>
-              <a:ext cx="1714500" cy="952500"/>
-            </a:xfrm>
-            <a:custGeom>
-              <a:avLst/>
-              <a:gdLst/>
-              <a:ahLst/>
-              <a:cxnLst/>
-              <a:rect l="l" t="t" r="r" b="b"/>
-              <a:pathLst>
-                <a:path w="1714500" h="952500">
-                  <a:moveTo>
-                    <a:pt x="0" y="0"/>
-                  </a:moveTo>
-                  <a:lnTo>
-                    <a:pt x="1714500" y="0"/>
-                  </a:lnTo>
-                  <a:lnTo>
-                    <a:pt x="1714500" y="952500"/>
-                  </a:lnTo>
-                  <a:lnTo>
-                    <a:pt x="0" y="952500"/>
-                  </a:lnTo>
-                  <a:lnTo>
-                    <a:pt x="0" y="0"/>
-                  </a:lnTo>
-                  <a:close/>
-                </a:path>
-              </a:pathLst>
-            </a:custGeom>
-            <a:blipFill>
-              <a:blip r:embed="rId5"/>
-              <a:stretch>
-                <a:fillRect b="-2000"/>
-              </a:stretch>
-            </a:blipFill>
-          </p:spPr>
-          <p:txBody>
-            <a:bodyPr/>
-            <a:lstStyle/>
-            <a:p>
-              <a:endParaRPr lang="zh-TW" altLang="en-US"/>
-            </a:p>
-          </p:txBody>
-        </p:sp>
-      </p:grpSp>
-      <p:sp>
-        <p:nvSpPr>
-          <p:cNvPr id="21" name="TextBox 21"/>
-          <p:cNvSpPr txBox="1"/>
-          <p:nvPr/>
-        </p:nvSpPr>
-        <p:spPr>
-          <a:xfrm>
-            <a:off x="2500312" y="5567515"/>
-            <a:ext cx="14930438" cy="373856"/>
-          </a:xfrm>
-          <a:prstGeom prst="rect">
-            <a:avLst/>
-          </a:prstGeom>
-        </p:spPr>
-        <p:txBody>
-          <a:bodyPr lIns="0" tIns="0" rIns="0" bIns="0" rtlCol="0" anchor="t">
-            <a:spAutoFit/>
-          </a:bodyPr>
-          <a:lstStyle/>
-          <a:p>
-            <a:pPr algn="l">
-              <a:lnSpc>
-                <a:spcPts val="2631"/>
-              </a:lnSpc>
-            </a:pPr>
-            <a:r>
-              <a:rPr lang="en-US" sz="1462">
-                <a:solidFill>
-                  <a:srgbClr val="334155"/>
-                </a:solidFill>
-                <a:latin typeface="Arimo"/>
-                <a:ea typeface="Arimo"/>
-                <a:cs typeface="Arimo"/>
-                <a:sym typeface="Arimo"/>
-              </a:rPr>
-              <a:t>https://diagram-generator.com/_next/image?url=%2Fassets%2Fstyles%2Fcorporate-clean.webp&amp;w=1536&amp;q=50&amp;dpl=dpl_Cp4fcsC7vy89q5t4VgGLV7Hiudh7</a:t>
-            </a:r>
-          </a:p>
-        </p:txBody>
-      </p:sp>
-      <p:sp>
-        <p:nvSpPr>
-          <p:cNvPr id="22" name="TextBox 22"/>
-          <p:cNvSpPr txBox="1"/>
-          <p:nvPr/>
-        </p:nvSpPr>
-        <p:spPr>
-          <a:xfrm>
-            <a:off x="2500312" y="5888984"/>
-            <a:ext cx="14930438" cy="466725"/>
-          </a:xfrm>
-          <a:prstGeom prst="rect">
-            <a:avLst/>
-          </a:prstGeom>
-        </p:spPr>
-        <p:txBody>
-          <a:bodyPr lIns="0" tIns="0" rIns="0" bIns="0" rtlCol="0" anchor="t">
-            <a:spAutoFit/>
-          </a:bodyPr>
-          <a:lstStyle/>
-          <a:p>
-            <a:pPr algn="l">
-              <a:lnSpc>
-                <a:spcPts val="3240"/>
-              </a:lnSpc>
-            </a:pPr>
-            <a:r>
-              <a:rPr lang="en-US" sz="1800">
-                <a:solidFill>
-                  <a:srgbClr val="334155"/>
-                </a:solidFill>
-                <a:latin typeface="Arimo"/>
-                <a:ea typeface="Arimo"/>
-                <a:cs typeface="Arimo"/>
-                <a:sym typeface="Arimo"/>
-              </a:rPr>
-              <a:t>Source: </a:t>
-            </a:r>
-            <a:r>
-              <a:rPr lang="en-US" sz="1800">
-                <a:solidFill>
-                  <a:srgbClr val="4F46E5"/>
-                </a:solidFill>
-                <a:latin typeface="Arimo"/>
-                <a:ea typeface="Arimo"/>
-                <a:cs typeface="Arimo"/>
-                <a:sym typeface="Arimo"/>
-              </a:rPr>
-              <a:t>diagram-generator.com</a:t>
-            </a:r>
-          </a:p>
-        </p:txBody>
-      </p:sp>
-      <p:grpSp>
-        <p:nvGrpSpPr>
-          <p:cNvPr id="23" name="Group 23"/>
-          <p:cNvGrpSpPr/>
-          <p:nvPr/>
-        </p:nvGrpSpPr>
-        <p:grpSpPr>
-          <a:xfrm>
-            <a:off x="857250" y="6937924"/>
-            <a:ext cx="1285875" cy="714375"/>
-            <a:chOff x="0" y="0"/>
-            <a:chExt cx="1714500" cy="952500"/>
-          </a:xfrm>
-        </p:grpSpPr>
-        <p:sp>
-          <p:nvSpPr>
-            <p:cNvPr id="24" name="Freeform 24" descr="image.png"/>
-            <p:cNvSpPr/>
-            <p:nvPr/>
-          </p:nvSpPr>
-          <p:spPr>
-            <a:xfrm>
-              <a:off x="0" y="0"/>
-              <a:ext cx="1714500" cy="952500"/>
-            </a:xfrm>
-            <a:custGeom>
-              <a:avLst/>
-              <a:gdLst/>
-              <a:ahLst/>
-              <a:cxnLst/>
-              <a:rect l="l" t="t" r="r" b="b"/>
-              <a:pathLst>
-                <a:path w="1714500" h="952500">
-                  <a:moveTo>
-                    <a:pt x="0" y="0"/>
-                  </a:moveTo>
-                  <a:lnTo>
-                    <a:pt x="1714500" y="0"/>
-                  </a:lnTo>
-                  <a:lnTo>
-                    <a:pt x="1714500" y="952500"/>
-                  </a:lnTo>
-                  <a:lnTo>
-                    <a:pt x="0" y="952500"/>
-                  </a:lnTo>
-                  <a:lnTo>
-                    <a:pt x="0" y="0"/>
-                  </a:lnTo>
-                  <a:close/>
-                </a:path>
-              </a:pathLst>
-            </a:custGeom>
-            <a:blipFill>
-              <a:blip r:embed="rId6"/>
-              <a:stretch>
-                <a:fillRect b="-2000"/>
-              </a:stretch>
-            </a:blipFill>
-          </p:spPr>
-          <p:txBody>
-            <a:bodyPr/>
-            <a:lstStyle/>
-            <a:p>
-              <a:endParaRPr lang="zh-TW" altLang="en-US"/>
-            </a:p>
-          </p:txBody>
-        </p:sp>
-      </p:grpSp>
-      <p:sp>
-        <p:nvSpPr>
-          <p:cNvPr id="25" name="TextBox 25"/>
-          <p:cNvSpPr txBox="1"/>
-          <p:nvPr/>
-        </p:nvSpPr>
-        <p:spPr>
-          <a:xfrm>
-            <a:off x="2500312" y="6714087"/>
-            <a:ext cx="14930438" cy="652462"/>
-          </a:xfrm>
-          <a:prstGeom prst="rect">
-            <a:avLst/>
-          </a:prstGeom>
-        </p:spPr>
-        <p:txBody>
-          <a:bodyPr lIns="0" tIns="0" rIns="0" bIns="0" rtlCol="0" anchor="t">
-            <a:spAutoFit/>
-          </a:bodyPr>
-          <a:lstStyle/>
-          <a:p>
-            <a:pPr algn="l">
-              <a:lnSpc>
-                <a:spcPts val="2631"/>
-              </a:lnSpc>
-            </a:pPr>
-            <a:r>
-              <a:rPr lang="en-US" sz="1462">
-                <a:solidFill>
-                  <a:srgbClr val="334155"/>
-                </a:solidFill>
-                <a:latin typeface="Arimo"/>
-                <a:ea typeface="Arimo"/>
-                <a:cs typeface="Arimo"/>
-                <a:sym typeface="Arimo"/>
-              </a:rPr>
-              <a:t>https://static.vecteezy.com/system/resources/thumbnails/069/008/418/small_2x/up-and-down-arrow-icons-in-green-and-red-with-percentage-and-dollar-symbols-representing-financial-growth-decline-interest-rates-currency-changes-and-market-trends-vector.jpg</a:t>
-            </a:r>
-          </a:p>
-        </p:txBody>
-      </p:sp>
-      <p:sp>
-        <p:nvSpPr>
-          <p:cNvPr id="26" name="TextBox 26"/>
-          <p:cNvSpPr txBox="1"/>
-          <p:nvPr/>
-        </p:nvSpPr>
-        <p:spPr>
-          <a:xfrm>
-            <a:off x="2500312" y="7314162"/>
-            <a:ext cx="14930438" cy="466725"/>
-          </a:xfrm>
-          <a:prstGeom prst="rect">
-            <a:avLst/>
-          </a:prstGeom>
-        </p:spPr>
-        <p:txBody>
-          <a:bodyPr lIns="0" tIns="0" rIns="0" bIns="0" rtlCol="0" anchor="t">
-            <a:spAutoFit/>
-          </a:bodyPr>
-          <a:lstStyle/>
-          <a:p>
-            <a:pPr algn="l">
-              <a:lnSpc>
-                <a:spcPts val="3240"/>
-              </a:lnSpc>
-            </a:pPr>
-            <a:r>
-              <a:rPr lang="en-US" sz="1800">
-                <a:solidFill>
-                  <a:srgbClr val="334155"/>
-                </a:solidFill>
-                <a:latin typeface="Arimo"/>
-                <a:ea typeface="Arimo"/>
-                <a:cs typeface="Arimo"/>
-                <a:sym typeface="Arimo"/>
-              </a:rPr>
-              <a:t>Source: </a:t>
-            </a:r>
-            <a:r>
-              <a:rPr lang="en-US" sz="1800">
-                <a:solidFill>
-                  <a:srgbClr val="4F46E5"/>
-                </a:solidFill>
-                <a:latin typeface="Arimo"/>
-                <a:ea typeface="Arimo"/>
-                <a:cs typeface="Arimo"/>
-                <a:sym typeface="Arimo"/>
-              </a:rPr>
-              <a:t>www.vecteezy.com</a:t>
+              <a:t>112111207 陳品霖 | Power BI Financial Analytics</a:t>
             </a:r>
           </a:p>
         </p:txBody>
@@ -14655,8 +14485,8 @@
           </a:p>
         </p:txBody>
       </p:sp>
-      <mc:AlternateContent xmlns:mc="http://schemas.openxmlformats.org/markup-compatibility/2006">
-        <mc:Choice xmlns:a14="http://schemas.microsoft.com/office/drawing/2010/main" Requires="a14">
+      <mc:AlternateContent xmlns:mc="http://schemas.openxmlformats.org/markup-compatibility/2006" xmlns:a14="http://schemas.microsoft.com/office/drawing/2010/main">
+        <mc:Choice Requires="a14">
           <p:sp>
             <p:nvSpPr>
               <p:cNvPr id="12" name="TextBox 12"/>
@@ -14760,7 +14590,7 @@
             </p:txBody>
           </p:sp>
         </mc:Choice>
-        <mc:Fallback>
+        <mc:Fallback xmlns="">
           <p:sp>
             <p:nvSpPr>
               <p:cNvPr id="12" name="TextBox 12"/>
@@ -14840,8 +14670,8 @@
           </a:p>
         </p:txBody>
       </p:sp>
-      <mc:AlternateContent xmlns:mc="http://schemas.openxmlformats.org/markup-compatibility/2006">
-        <mc:Choice xmlns:a14="http://schemas.microsoft.com/office/drawing/2010/main" Requires="a14">
+      <mc:AlternateContent xmlns:mc="http://schemas.openxmlformats.org/markup-compatibility/2006" xmlns:a14="http://schemas.microsoft.com/office/drawing/2010/main">
+        <mc:Choice Requires="a14">
           <p:sp>
             <p:nvSpPr>
               <p:cNvPr id="14" name="TextBox 14"/>
@@ -14967,7 +14797,7 @@
             </p:txBody>
           </p:sp>
         </mc:Choice>
-        <mc:Fallback>
+        <mc:Fallback xmlns="">
           <p:sp>
             <p:nvSpPr>
               <p:cNvPr id="14" name="TextBox 14"/>

--- a/數位資產與金融指數動態關聯研究.pptx.pptx
+++ b/數位資產與金融指數動態關聯研究.pptx.pptx
@@ -5,7 +5,7 @@
     <p:sldMasterId id="2147483648" r:id="rId1"/>
   </p:sldMasterIdLst>
   <p:notesMasterIdLst>
-    <p:notesMasterId r:id="rId15"/>
+    <p:notesMasterId r:id="rId14"/>
   </p:notesMasterIdLst>
   <p:sldIdLst>
     <p:sldId id="256" r:id="rId2"/>
@@ -19,27 +19,26 @@
     <p:sldId id="264" r:id="rId10"/>
     <p:sldId id="265" r:id="rId11"/>
     <p:sldId id="270" r:id="rId12"/>
-    <p:sldId id="263" r:id="rId13"/>
-    <p:sldId id="266" r:id="rId14"/>
+    <p:sldId id="266" r:id="rId13"/>
   </p:sldIdLst>
   <p:sldSz cx="18288000" cy="10287000"/>
   <p:notesSz cx="6858000" cy="9144000"/>
   <p:embeddedFontLst>
     <p:embeddedFont>
       <p:font typeface="Arimo" panose="020B0604020202020204" charset="0"/>
+      <p:regular r:id="rId15"/>
+    </p:embeddedFont>
+    <p:embeddedFont>
+      <p:font typeface="Arimo Bold" panose="020B0604020202020204" charset="0"/>
       <p:regular r:id="rId16"/>
     </p:embeddedFont>
     <p:embeddedFont>
-      <p:font typeface="Arimo Bold" panose="020B0604020202020204" charset="0"/>
+      <p:font typeface="Arimo Italics" panose="020B0604020202020204" charset="0"/>
       <p:regular r:id="rId17"/>
     </p:embeddedFont>
     <p:embeddedFont>
-      <p:font typeface="Arimo Italics" panose="020B0604020202020204" charset="0"/>
+      <p:font typeface="Cambria Math" panose="02040503050406030204" pitchFamily="18" charset="0"/>
       <p:regular r:id="rId18"/>
-    </p:embeddedFont>
-    <p:embeddedFont>
-      <p:font typeface="Cambria Math" panose="02040503050406030204" pitchFamily="18" charset="0"/>
-      <p:regular r:id="rId19"/>
     </p:embeddedFont>
   </p:embeddedFontLst>
   <p:defaultTextStyle>
@@ -159,7 +158,7 @@
 <file path=ppt/revisionInfo.xml><?xml version="1.0" encoding="utf-8"?>
 <p1510:revInfo xmlns:a="http://schemas.openxmlformats.org/drawingml/2006/main" xmlns:r="http://schemas.openxmlformats.org/officeDocument/2006/relationships" xmlns:p1510="http://schemas.microsoft.com/office/powerpoint/2015/10/main">
   <p1510:revLst>
-    <p1510:client id="{6696B2DA-DD7A-4D37-A974-E878BD62707E}" v="13" dt="2026-06-14T21:00:13.132"/>
+    <p1510:client id="{6696B2DA-DD7A-4D37-A974-E878BD62707E}" v="15" dt="2026-06-14T21:26:19.145"/>
   </p1510:revLst>
 </p1510:revInfo>
 </file>
@@ -169,7 +168,7 @@
   <pc:docChgLst>
     <pc:chgData name="品霖 陳" userId="5ef9ed508cbbf1ec" providerId="LiveId" clId="{5EA5911F-D3CC-464D-872A-55AFC748B5BC}"/>
     <pc:docChg chg="undo custSel addSld delSld modSld">
-      <pc:chgData name="品霖 陳" userId="5ef9ed508cbbf1ec" providerId="LiveId" clId="{5EA5911F-D3CC-464D-872A-55AFC748B5BC}" dt="2026-06-14T21:00:44.400" v="200" actId="1076"/>
+      <pc:chgData name="品霖 陳" userId="5ef9ed508cbbf1ec" providerId="LiveId" clId="{5EA5911F-D3CC-464D-872A-55AFC748B5BC}" dt="2026-06-14T21:47:44.654" v="248" actId="47"/>
       <pc:docMkLst>
         <pc:docMk/>
       </pc:docMkLst>
@@ -187,6 +186,51 @@
             <ac:grpSpMk id="2" creationId="{00000000-0000-0000-0000-000000000000}"/>
           </ac:grpSpMkLst>
         </pc:grpChg>
+      </pc:sldChg>
+      <pc:sldChg chg="modSp mod">
+        <pc:chgData name="品霖 陳" userId="5ef9ed508cbbf1ec" providerId="LiveId" clId="{5EA5911F-D3CC-464D-872A-55AFC748B5BC}" dt="2026-06-14T21:26:47.184" v="236" actId="20577"/>
+        <pc:sldMkLst>
+          <pc:docMk/>
+          <pc:sldMk cId="0" sldId="262"/>
+        </pc:sldMkLst>
+        <pc:spChg chg="mod">
+          <ac:chgData name="品霖 陳" userId="5ef9ed508cbbf1ec" providerId="LiveId" clId="{5EA5911F-D3CC-464D-872A-55AFC748B5BC}" dt="2026-06-14T21:26:47.184" v="236" actId="20577"/>
+          <ac:spMkLst>
+            <pc:docMk/>
+            <pc:sldMk cId="0" sldId="262"/>
+            <ac:spMk id="6" creationId="{00000000-0000-0000-0000-000000000000}"/>
+          </ac:spMkLst>
+        </pc:spChg>
+        <pc:spChg chg="mod">
+          <ac:chgData name="品霖 陳" userId="5ef9ed508cbbf1ec" providerId="LiveId" clId="{5EA5911F-D3CC-464D-872A-55AFC748B5BC}" dt="2026-06-14T21:26:16.234" v="204"/>
+          <ac:spMkLst>
+            <pc:docMk/>
+            <pc:sldMk cId="0" sldId="262"/>
+            <ac:spMk id="16" creationId="{00000000-0000-0000-0000-000000000000}"/>
+          </ac:spMkLst>
+        </pc:spChg>
+      </pc:sldChg>
+      <pc:sldChg chg="add del">
+        <pc:chgData name="品霖 陳" userId="5ef9ed508cbbf1ec" providerId="LiveId" clId="{5EA5911F-D3CC-464D-872A-55AFC748B5BC}" dt="2026-06-14T21:47:44.654" v="248" actId="47"/>
+        <pc:sldMkLst>
+          <pc:docMk/>
+          <pc:sldMk cId="0" sldId="263"/>
+        </pc:sldMkLst>
+      </pc:sldChg>
+      <pc:sldChg chg="modSp mod">
+        <pc:chgData name="品霖 陳" userId="5ef9ed508cbbf1ec" providerId="LiveId" clId="{5EA5911F-D3CC-464D-872A-55AFC748B5BC}" dt="2026-06-14T21:28:14.130" v="247" actId="1076"/>
+        <pc:sldMkLst>
+          <pc:docMk/>
+          <pc:sldMk cId="0" sldId="264"/>
+        </pc:sldMkLst>
+        <pc:spChg chg="mod">
+          <ac:chgData name="品霖 陳" userId="5ef9ed508cbbf1ec" providerId="LiveId" clId="{5EA5911F-D3CC-464D-872A-55AFC748B5BC}" dt="2026-06-14T21:28:14.130" v="247" actId="1076"/>
+          <ac:spMkLst>
+            <pc:docMk/>
+            <pc:sldMk cId="0" sldId="264"/>
+            <ac:spMk id="12" creationId="{00000000-0000-0000-0000-000000000000}"/>
+          </ac:spMkLst>
+        </pc:spChg>
       </pc:sldChg>
       <pc:sldChg chg="del">
         <pc:chgData name="品霖 陳" userId="5ef9ed508cbbf1ec" providerId="LiveId" clId="{5EA5911F-D3CC-464D-872A-55AFC748B5BC}" dt="2026-06-14T20:55:59.703" v="2" actId="47"/>
@@ -1330,221 +1374,6 @@
 </file>
 
 <file path=ppt/notesSlides/notesSlide12.xml><?xml version="1.0" encoding="utf-8"?>
-<p:notes xmlns:a="http://schemas.openxmlformats.org/drawingml/2006/main" xmlns:r="http://schemas.openxmlformats.org/officeDocument/2006/relationships" xmlns:p="http://schemas.openxmlformats.org/presentationml/2006/main">
-  <p:cSld>
-    <p:spTree>
-      <p:nvGrpSpPr>
-        <p:cNvPr id="1" name=""/>
-        <p:cNvGrpSpPr/>
-        <p:nvPr/>
-      </p:nvGrpSpPr>
-      <p:grpSpPr>
-        <a:xfrm>
-          <a:off x="0" y="0"/>
-          <a:ext cx="0" cy="0"/>
-          <a:chOff x="0" y="0"/>
-          <a:chExt cx="0" cy="0"/>
-        </a:xfrm>
-      </p:grpSpPr>
-      <p:sp>
-        <p:nvSpPr>
-          <p:cNvPr id="2" name="Header Placeholder 1"/>
-          <p:cNvSpPr>
-            <a:spLocks noGrp="1"/>
-          </p:cNvSpPr>
-          <p:nvPr>
-            <p:ph type="hdr" sz="quarter"/>
-          </p:nvPr>
-        </p:nvSpPr>
-        <p:spPr>
-          <a:xfrm>
-            <a:off x="0" y="0"/>
-            <a:ext cx="3962400" cy="342900"/>
-          </a:xfrm>
-          <a:prstGeom prst="rect">
-            <a:avLst/>
-          </a:prstGeom>
-        </p:spPr>
-        <p:txBody>
-          <a:bodyPr vert="horz" lIns="91440" tIns="45720" rIns="91440" bIns="45720" rtlCol="0"/>
-          <a:lstStyle>
-            <a:lvl1pPr algn="l">
-              <a:defRPr sz="1200"/>
-            </a:lvl1pPr>
-          </a:lstStyle>
-          <a:p>
-            <a:endParaRPr/>
-          </a:p>
-        </p:txBody>
-      </p:sp>
-      <p:sp>
-        <p:nvSpPr>
-          <p:cNvPr id="3" name="Date Placeholder 2"/>
-          <p:cNvSpPr>
-            <a:spLocks noGrp="1"/>
-          </p:cNvSpPr>
-          <p:nvPr>
-            <p:ph type="dt" idx="1"/>
-          </p:nvPr>
-        </p:nvSpPr>
-        <p:spPr>
-          <a:xfrm>
-            <a:off x="5180013" y="0"/>
-            <a:ext cx="3962400" cy="342900"/>
-          </a:xfrm>
-          <a:prstGeom prst="rect">
-            <a:avLst/>
-          </a:prstGeom>
-        </p:spPr>
-        <p:txBody>
-          <a:bodyPr vert="horz" lIns="91440" tIns="45720" rIns="91440" bIns="45720" rtlCol="0"/>
-          <a:lstStyle>
-            <a:lvl1pPr algn="r">
-              <a:defRPr sz="1200"/>
-            </a:lvl1pPr>
-          </a:lstStyle>
-          <a:p>
-            <a:r>
-              <a:rPr lang="cs-CZ"/>
-              <a:t>1.7.2013</a:t>
-            </a:r>
-          </a:p>
-        </p:txBody>
-      </p:sp>
-      <p:sp>
-        <p:nvSpPr>
-          <p:cNvPr id="4" name="Slide Image Placeholder 3"/>
-          <p:cNvSpPr>
-            <a:spLocks noGrp="1" noRot="1" noChangeAspect="1"/>
-          </p:cNvSpPr>
-          <p:nvPr>
-            <p:ph type="sldImg" idx="2"/>
-          </p:nvPr>
-        </p:nvSpPr>
-        <p:spPr>
-          <a:xfrm>
-            <a:off x="2290763" y="512763"/>
-            <a:ext cx="4562475" cy="2566987"/>
-          </a:xfrm>
-          <a:prstGeom prst="rect">
-            <a:avLst/>
-          </a:prstGeom>
-          <a:noFill/>
-          <a:ln w="12700">
-            <a:solidFill>
-              <a:prstClr val="black"/>
-            </a:solidFill>
-          </a:ln>
-        </p:spPr>
-        <p:txBody>
-          <a:bodyPr vert="horz" lIns="91440" tIns="45720" rIns="91440" bIns="45720" rtlCol="0" anchor="ctr"/>
-          <a:lstStyle/>
-          <a:p>
-            <a:endParaRPr/>
-          </a:p>
-        </p:txBody>
-      </p:sp>
-      <p:sp>
-        <p:nvSpPr>
-          <p:cNvPr id="5" name="Notes Placeholder 4"/>
-          <p:cNvSpPr>
-            <a:spLocks noGrp="1"/>
-          </p:cNvSpPr>
-          <p:nvPr>
-            <p:ph type="body" sz="quarter" idx="3"/>
-          </p:nvPr>
-        </p:nvSpPr>
-        <p:spPr>
-          <a:xfrm>
-            <a:off x="914400" y="3251200"/>
-            <a:ext cx="7315200" cy="3081338"/>
-          </a:xfrm>
-          <a:prstGeom prst="rect">
-            <a:avLst/>
-          </a:prstGeom>
-        </p:spPr>
-        <p:txBody>
-          <a:bodyPr vert="horz" lIns="91440" tIns="45720" rIns="91440" bIns="45720" rtlCol="0"/>
-          <a:lstStyle/>
-          <a:p>
-            <a:endParaRPr lang="en-US"/>
-          </a:p>
-        </p:txBody>
-      </p:sp>
-      <p:sp>
-        <p:nvSpPr>
-          <p:cNvPr id="6" name="Footer Placeholder 5"/>
-          <p:cNvSpPr>
-            <a:spLocks noGrp="1"/>
-          </p:cNvSpPr>
-          <p:nvPr>
-            <p:ph type="ftr" sz="quarter" idx="4"/>
-          </p:nvPr>
-        </p:nvSpPr>
-        <p:spPr>
-          <a:xfrm>
-            <a:off x="0" y="6502400"/>
-            <a:ext cx="3962400" cy="341313"/>
-          </a:xfrm>
-          <a:prstGeom prst="rect">
-            <a:avLst/>
-          </a:prstGeom>
-        </p:spPr>
-        <p:txBody>
-          <a:bodyPr vert="horz" lIns="91440" tIns="45720" rIns="91440" bIns="45720" rtlCol="0" anchor="b"/>
-          <a:lstStyle>
-            <a:lvl1pPr algn="l">
-              <a:defRPr sz="1200"/>
-            </a:lvl1pPr>
-          </a:lstStyle>
-          <a:p>
-            <a:endParaRPr/>
-          </a:p>
-        </p:txBody>
-      </p:sp>
-      <p:sp>
-        <p:nvSpPr>
-          <p:cNvPr id="7" name="Slide Number Placeholder 6"/>
-          <p:cNvSpPr>
-            <a:spLocks noGrp="1"/>
-          </p:cNvSpPr>
-          <p:nvPr>
-            <p:ph type="sldNum" sz="quarter" idx="5"/>
-          </p:nvPr>
-        </p:nvSpPr>
-        <p:spPr>
-          <a:xfrm>
-            <a:off x="5180013" y="6502400"/>
-            <a:ext cx="3962400" cy="341313"/>
-          </a:xfrm>
-          <a:prstGeom prst="rect">
-            <a:avLst/>
-          </a:prstGeom>
-        </p:spPr>
-        <p:txBody>
-          <a:bodyPr vert="horz" lIns="91440" tIns="45720" rIns="91440" bIns="45720" rtlCol="0" anchor="b"/>
-          <a:lstStyle>
-            <a:lvl1pPr algn="r">
-              <a:defRPr sz="1200"/>
-            </a:lvl1pPr>
-          </a:lstStyle>
-          <a:p>
-            <a:r>
-              <a:rPr lang="cs-CZ"/>
-              <a:t>‹#›</a:t>
-            </a:r>
-          </a:p>
-        </p:txBody>
-      </p:sp>
-    </p:spTree>
-  </p:cSld>
-  <p:clrMapOvr>
-    <a:masterClrMapping/>
-  </p:clrMapOvr>
-</p:notes>
-</file>
-
-<file path=ppt/notesSlides/notesSlide13.xml><?xml version="1.0" encoding="utf-8"?>
 <p:notes xmlns:a="http://schemas.openxmlformats.org/drawingml/2006/main" xmlns:r="http://schemas.openxmlformats.org/officeDocument/2006/relationships" xmlns:p="http://schemas.openxmlformats.org/presentationml/2006/main">
   <p:cSld>
     <p:spTree>
@@ -7928,2271 +7757,6 @@
         </p:nvSpPr>
         <p:spPr>
           <a:xfrm>
-            <a:off x="857250" y="1302839"/>
-            <a:ext cx="17402175" cy="871537"/>
-          </a:xfrm>
-          <a:prstGeom prst="rect">
-            <a:avLst/>
-          </a:prstGeom>
-        </p:spPr>
-        <p:txBody>
-          <a:bodyPr lIns="0" tIns="0" rIns="0" bIns="0" rtlCol="0" anchor="t">
-            <a:spAutoFit/>
-          </a:bodyPr>
-          <a:lstStyle/>
-          <a:p>
-            <a:pPr algn="l">
-              <a:lnSpc>
-                <a:spcPts val="5400"/>
-              </a:lnSpc>
-            </a:pPr>
-            <a:r>
-              <a:rPr lang="en-US" sz="4500" b="1">
-                <a:solidFill>
-                  <a:srgbClr val="1E293B"/>
-                </a:solidFill>
-                <a:latin typeface="Arimo Bold"/>
-                <a:ea typeface="Arimo Bold"/>
-                <a:cs typeface="Arimo Bold"/>
-                <a:sym typeface="Arimo Bold"/>
-              </a:rPr>
-              <a:t>開發歷程與版本控制 (Git Record)</a:t>
-            </a:r>
-          </a:p>
-        </p:txBody>
-      </p:sp>
-      <p:grpSp>
-        <p:nvGrpSpPr>
-          <p:cNvPr id="5" name="Group 5"/>
-          <p:cNvGrpSpPr/>
-          <p:nvPr/>
-        </p:nvGrpSpPr>
-        <p:grpSpPr>
-          <a:xfrm>
-            <a:off x="857250" y="2445839"/>
-            <a:ext cx="16573500" cy="14288"/>
-            <a:chOff x="0" y="0"/>
-            <a:chExt cx="22098000" cy="19050"/>
-          </a:xfrm>
-        </p:grpSpPr>
-        <p:sp>
-          <p:nvSpPr>
-            <p:cNvPr id="6" name="Freeform 6"/>
-            <p:cNvSpPr/>
-            <p:nvPr/>
-          </p:nvSpPr>
-          <p:spPr>
-            <a:xfrm>
-              <a:off x="0" y="0"/>
-              <a:ext cx="22098000" cy="19050"/>
-            </a:xfrm>
-            <a:custGeom>
-              <a:avLst/>
-              <a:gdLst/>
-              <a:ahLst/>
-              <a:cxnLst/>
-              <a:rect l="l" t="t" r="r" b="b"/>
-              <a:pathLst>
-                <a:path w="22098000" h="19050">
-                  <a:moveTo>
-                    <a:pt x="0" y="0"/>
-                  </a:moveTo>
-                  <a:lnTo>
-                    <a:pt x="22098000" y="0"/>
-                  </a:lnTo>
-                  <a:lnTo>
-                    <a:pt x="22098000" y="19050"/>
-                  </a:lnTo>
-                  <a:lnTo>
-                    <a:pt x="0" y="19050"/>
-                  </a:lnTo>
-                  <a:close/>
-                </a:path>
-              </a:pathLst>
-            </a:custGeom>
-            <a:solidFill>
-              <a:srgbClr val="E2E8F0"/>
-            </a:solidFill>
-          </p:spPr>
-          <p:txBody>
-            <a:bodyPr/>
-            <a:lstStyle/>
-            <a:p>
-              <a:endParaRPr lang="zh-TW" altLang="en-US"/>
-            </a:p>
-          </p:txBody>
-        </p:sp>
-      </p:grpSp>
-      <p:graphicFrame>
-        <p:nvGraphicFramePr>
-          <p:cNvPr id="7" name="Table 7"/>
-          <p:cNvGraphicFramePr>
-            <a:graphicFrameLocks noGrp="1"/>
-          </p:cNvGraphicFramePr>
-          <p:nvPr/>
-        </p:nvGraphicFramePr>
-        <p:xfrm>
-          <a:off x="857250" y="4230438"/>
-          <a:ext cx="16535399" cy="3238500"/>
-        </p:xfrm>
-        <a:graphic>
-          <a:graphicData uri="http://schemas.openxmlformats.org/drawingml/2006/table">
-            <a:tbl>
-              <a:tblPr/>
-              <a:tblGrid>
-                <a:gridCol w="2921125">
-                  <a:extLst>
-                    <a:ext uri="{9D8B030D-6E8A-4147-A177-3AD203B41FA5}">
-                      <a16:colId xmlns:a16="http://schemas.microsoft.com/office/drawing/2014/main" val="20000"/>
-                    </a:ext>
-                  </a:extLst>
-                </a:gridCol>
-                <a:gridCol w="2705316">
-                  <a:extLst>
-                    <a:ext uri="{9D8B030D-6E8A-4147-A177-3AD203B41FA5}">
-                      <a16:colId xmlns:a16="http://schemas.microsoft.com/office/drawing/2014/main" val="20001"/>
-                    </a:ext>
-                  </a:extLst>
-                </a:gridCol>
-                <a:gridCol w="10908958">
-                  <a:extLst>
-                    <a:ext uri="{9D8B030D-6E8A-4147-A177-3AD203B41FA5}">
-                      <a16:colId xmlns:a16="http://schemas.microsoft.com/office/drawing/2014/main" val="20002"/>
-                    </a:ext>
-                  </a:extLst>
-                </a:gridCol>
-              </a:tblGrid>
-              <a:tr h="647700">
-                <a:tc>
-                  <a:txBody>
-                    <a:bodyPr/>
-                    <a:lstStyle/>
-                    <a:p>
-                      <a:pPr algn="l">
-                        <a:lnSpc>
-                          <a:spcPts val="2160"/>
-                        </a:lnSpc>
-                        <a:defRPr/>
-                      </a:pPr>
-                      <a:r>
-                        <a:rPr lang="en-US" sz="1800" b="1">
-                          <a:solidFill>
-                            <a:srgbClr val="000000"/>
-                          </a:solidFill>
-                          <a:latin typeface="Arimo Bold"/>
-                          <a:ea typeface="Arimo Bold"/>
-                          <a:cs typeface="Arimo Bold"/>
-                          <a:sym typeface="Arimo Bold"/>
-                        </a:rPr>
-                        <a:t>Commit Hash</a:t>
-                      </a:r>
-                      <a:endParaRPr lang="en-US" sz="1100"/>
-                    </a:p>
-                  </a:txBody>
-                  <a:tcPr marL="63500" marR="63500" marT="63500" marB="63500" anchor="ctr">
-                    <a:lnL w="9525" cap="flat" cmpd="sng" algn="ctr">
-                      <a:solidFill>
-                        <a:srgbClr val="000000"/>
-                      </a:solidFill>
-                      <a:prstDash val="solid"/>
-                      <a:round/>
-                      <a:headEnd type="none" w="med" len="med"/>
-                      <a:tailEnd type="none" w="med" len="med"/>
-                    </a:lnL>
-                    <a:lnR w="9525" cap="flat" cmpd="sng" algn="ctr">
-                      <a:solidFill>
-                        <a:srgbClr val="000000"/>
-                      </a:solidFill>
-                      <a:prstDash val="solid"/>
-                      <a:round/>
-                      <a:headEnd type="none" w="med" len="med"/>
-                      <a:tailEnd type="none" w="med" len="med"/>
-                    </a:lnR>
-                    <a:lnT w="9525" cap="flat" cmpd="sng" algn="ctr">
-                      <a:solidFill>
-                        <a:srgbClr val="000000"/>
-                      </a:solidFill>
-                      <a:prstDash val="solid"/>
-                      <a:round/>
-                      <a:headEnd type="none" w="med" len="med"/>
-                      <a:tailEnd type="none" w="med" len="med"/>
-                    </a:lnT>
-                    <a:lnB w="9525" cap="flat" cmpd="sng" algn="ctr">
-                      <a:solidFill>
-                        <a:srgbClr val="000000"/>
-                      </a:solidFill>
-                      <a:prstDash val="solid"/>
-                      <a:round/>
-                      <a:headEnd type="none" w="med" len="med"/>
-                      <a:tailEnd type="none" w="med" len="med"/>
-                    </a:lnB>
-                    <a:solidFill>
-                      <a:srgbClr val="F1F5F9"/>
-                    </a:solidFill>
-                  </a:tcPr>
-                </a:tc>
-                <a:tc>
-                  <a:txBody>
-                    <a:bodyPr/>
-                    <a:lstStyle/>
-                    <a:p>
-                      <a:pPr algn="l">
-                        <a:lnSpc>
-                          <a:spcPts val="2160"/>
-                        </a:lnSpc>
-                        <a:defRPr/>
-                      </a:pPr>
-                      <a:r>
-                        <a:rPr lang="en-US" sz="1800" b="1">
-                          <a:solidFill>
-                            <a:srgbClr val="000000"/>
-                          </a:solidFill>
-                          <a:latin typeface="Arimo Bold"/>
-                          <a:ea typeface="Arimo Bold"/>
-                          <a:cs typeface="Arimo Bold"/>
-                          <a:sym typeface="Arimo Bold"/>
-                        </a:rPr>
-                        <a:t>Date</a:t>
-                      </a:r>
-                      <a:endParaRPr lang="en-US" sz="1100"/>
-                    </a:p>
-                  </a:txBody>
-                  <a:tcPr marL="63500" marR="63500" marT="63500" marB="63500" anchor="ctr">
-                    <a:lnL w="9525" cap="flat" cmpd="sng" algn="ctr">
-                      <a:solidFill>
-                        <a:srgbClr val="000000"/>
-                      </a:solidFill>
-                      <a:prstDash val="solid"/>
-                      <a:round/>
-                      <a:headEnd type="none" w="med" len="med"/>
-                      <a:tailEnd type="none" w="med" len="med"/>
-                    </a:lnL>
-                    <a:lnR w="9525" cap="flat" cmpd="sng" algn="ctr">
-                      <a:solidFill>
-                        <a:srgbClr val="000000"/>
-                      </a:solidFill>
-                      <a:prstDash val="solid"/>
-                      <a:round/>
-                      <a:headEnd type="none" w="med" len="med"/>
-                      <a:tailEnd type="none" w="med" len="med"/>
-                    </a:lnR>
-                    <a:lnT w="9525" cap="flat" cmpd="sng" algn="ctr">
-                      <a:solidFill>
-                        <a:srgbClr val="000000"/>
-                      </a:solidFill>
-                      <a:prstDash val="solid"/>
-                      <a:round/>
-                      <a:headEnd type="none" w="med" len="med"/>
-                      <a:tailEnd type="none" w="med" len="med"/>
-                    </a:lnT>
-                    <a:lnB w="9525" cap="flat" cmpd="sng" algn="ctr">
-                      <a:solidFill>
-                        <a:srgbClr val="000000"/>
-                      </a:solidFill>
-                      <a:prstDash val="solid"/>
-                      <a:round/>
-                      <a:headEnd type="none" w="med" len="med"/>
-                      <a:tailEnd type="none" w="med" len="med"/>
-                    </a:lnB>
-                    <a:solidFill>
-                      <a:srgbClr val="F1F5F9"/>
-                    </a:solidFill>
-                  </a:tcPr>
-                </a:tc>
-                <a:tc>
-                  <a:txBody>
-                    <a:bodyPr/>
-                    <a:lstStyle/>
-                    <a:p>
-                      <a:pPr algn="l">
-                        <a:lnSpc>
-                          <a:spcPts val="2160"/>
-                        </a:lnSpc>
-                        <a:defRPr/>
-                      </a:pPr>
-                      <a:r>
-                        <a:rPr lang="en-US" sz="1800" b="1">
-                          <a:solidFill>
-                            <a:srgbClr val="000000"/>
-                          </a:solidFill>
-                          <a:latin typeface="Arimo Bold"/>
-                          <a:ea typeface="Arimo Bold"/>
-                          <a:cs typeface="Arimo Bold"/>
-                          <a:sym typeface="Arimo Bold"/>
-                        </a:rPr>
-                        <a:t>Action / Feature</a:t>
-                      </a:r>
-                      <a:endParaRPr lang="en-US" sz="1100"/>
-                    </a:p>
-                  </a:txBody>
-                  <a:tcPr marL="63500" marR="63500" marT="63500" marB="63500" anchor="ctr">
-                    <a:lnL w="9525" cap="flat" cmpd="sng" algn="ctr">
-                      <a:solidFill>
-                        <a:srgbClr val="000000"/>
-                      </a:solidFill>
-                      <a:prstDash val="solid"/>
-                      <a:round/>
-                      <a:headEnd type="none" w="med" len="med"/>
-                      <a:tailEnd type="none" w="med" len="med"/>
-                    </a:lnL>
-                    <a:lnR w="9525" cap="flat" cmpd="sng" algn="ctr">
-                      <a:solidFill>
-                        <a:srgbClr val="000000"/>
-                      </a:solidFill>
-                      <a:prstDash val="solid"/>
-                      <a:round/>
-                      <a:headEnd type="none" w="med" len="med"/>
-                      <a:tailEnd type="none" w="med" len="med"/>
-                    </a:lnR>
-                    <a:lnT w="9525" cap="flat" cmpd="sng" algn="ctr">
-                      <a:solidFill>
-                        <a:srgbClr val="000000"/>
-                      </a:solidFill>
-                      <a:prstDash val="solid"/>
-                      <a:round/>
-                      <a:headEnd type="none" w="med" len="med"/>
-                      <a:tailEnd type="none" w="med" len="med"/>
-                    </a:lnT>
-                    <a:lnB w="9525" cap="flat" cmpd="sng" algn="ctr">
-                      <a:solidFill>
-                        <a:srgbClr val="000000"/>
-                      </a:solidFill>
-                      <a:prstDash val="solid"/>
-                      <a:round/>
-                      <a:headEnd type="none" w="med" len="med"/>
-                      <a:tailEnd type="none" w="med" len="med"/>
-                    </a:lnB>
-                    <a:solidFill>
-                      <a:srgbClr val="F1F5F9"/>
-                    </a:solidFill>
-                  </a:tcPr>
-                </a:tc>
-                <a:extLst>
-                  <a:ext uri="{0D108BD9-81ED-4DB2-BD59-A6C34878D82A}">
-                    <a16:rowId xmlns:a16="http://schemas.microsoft.com/office/drawing/2014/main" val="10000"/>
-                  </a:ext>
-                </a:extLst>
-              </a:tr>
-              <a:tr h="647700">
-                <a:tc>
-                  <a:txBody>
-                    <a:bodyPr/>
-                    <a:lstStyle/>
-                    <a:p>
-                      <a:pPr algn="l">
-                        <a:lnSpc>
-                          <a:spcPts val="2160"/>
-                        </a:lnSpc>
-                        <a:defRPr/>
-                      </a:pPr>
-                      <a:r>
-                        <a:rPr lang="en-US" sz="1800">
-                          <a:solidFill>
-                            <a:srgbClr val="000000"/>
-                          </a:solidFill>
-                          <a:latin typeface="Arimo"/>
-                          <a:ea typeface="Arimo"/>
-                          <a:cs typeface="Arimo"/>
-                          <a:sym typeface="Arimo"/>
-                        </a:rPr>
-                        <a:t>9a12b7c</a:t>
-                      </a:r>
-                      <a:endParaRPr lang="en-US" sz="1100"/>
-                    </a:p>
-                  </a:txBody>
-                  <a:tcPr marL="63500" marR="63500" marT="63500" marB="63500" anchor="ctr">
-                    <a:lnL w="9525" cap="flat" cmpd="sng" algn="ctr">
-                      <a:solidFill>
-                        <a:srgbClr val="000000"/>
-                      </a:solidFill>
-                      <a:prstDash val="solid"/>
-                      <a:round/>
-                      <a:headEnd type="none" w="med" len="med"/>
-                      <a:tailEnd type="none" w="med" len="med"/>
-                    </a:lnL>
-                    <a:lnR w="9525" cap="flat" cmpd="sng" algn="ctr">
-                      <a:solidFill>
-                        <a:srgbClr val="000000"/>
-                      </a:solidFill>
-                      <a:prstDash val="solid"/>
-                      <a:round/>
-                      <a:headEnd type="none" w="med" len="med"/>
-                      <a:tailEnd type="none" w="med" len="med"/>
-                    </a:lnR>
-                    <a:lnT w="9525" cap="flat" cmpd="sng" algn="ctr">
-                      <a:solidFill>
-                        <a:srgbClr val="000000"/>
-                      </a:solidFill>
-                      <a:prstDash val="solid"/>
-                      <a:round/>
-                      <a:headEnd type="none" w="med" len="med"/>
-                      <a:tailEnd type="none" w="med" len="med"/>
-                    </a:lnT>
-                    <a:lnB w="9525" cap="flat" cmpd="sng" algn="ctr">
-                      <a:solidFill>
-                        <a:srgbClr val="000000"/>
-                      </a:solidFill>
-                      <a:prstDash val="solid"/>
-                      <a:round/>
-                      <a:headEnd type="none" w="med" len="med"/>
-                      <a:tailEnd type="none" w="med" len="med"/>
-                    </a:lnB>
-                    <a:solidFill>
-                      <a:srgbClr val="CFD7E7"/>
-                    </a:solidFill>
-                  </a:tcPr>
-                </a:tc>
-                <a:tc>
-                  <a:txBody>
-                    <a:bodyPr/>
-                    <a:lstStyle/>
-                    <a:p>
-                      <a:pPr algn="l">
-                        <a:lnSpc>
-                          <a:spcPts val="2160"/>
-                        </a:lnSpc>
-                        <a:defRPr/>
-                      </a:pPr>
-                      <a:r>
-                        <a:rPr lang="en-US" sz="1800">
-                          <a:solidFill>
-                            <a:srgbClr val="000000"/>
-                          </a:solidFill>
-                          <a:latin typeface="Arimo"/>
-                          <a:ea typeface="Arimo"/>
-                          <a:cs typeface="Arimo"/>
-                          <a:sym typeface="Arimo"/>
-                        </a:rPr>
-                        <a:t>2026-05-15</a:t>
-                      </a:r>
-                      <a:endParaRPr lang="en-US" sz="1100"/>
-                    </a:p>
-                  </a:txBody>
-                  <a:tcPr marL="63500" marR="63500" marT="63500" marB="63500" anchor="ctr">
-                    <a:lnL w="9525" cap="flat" cmpd="sng" algn="ctr">
-                      <a:solidFill>
-                        <a:srgbClr val="000000"/>
-                      </a:solidFill>
-                      <a:prstDash val="solid"/>
-                      <a:round/>
-                      <a:headEnd type="none" w="med" len="med"/>
-                      <a:tailEnd type="none" w="med" len="med"/>
-                    </a:lnL>
-                    <a:lnR w="9525" cap="flat" cmpd="sng" algn="ctr">
-                      <a:solidFill>
-                        <a:srgbClr val="000000"/>
-                      </a:solidFill>
-                      <a:prstDash val="solid"/>
-                      <a:round/>
-                      <a:headEnd type="none" w="med" len="med"/>
-                      <a:tailEnd type="none" w="med" len="med"/>
-                    </a:lnR>
-                    <a:lnT w="9525" cap="flat" cmpd="sng" algn="ctr">
-                      <a:solidFill>
-                        <a:srgbClr val="000000"/>
-                      </a:solidFill>
-                      <a:prstDash val="solid"/>
-                      <a:round/>
-                      <a:headEnd type="none" w="med" len="med"/>
-                      <a:tailEnd type="none" w="med" len="med"/>
-                    </a:lnT>
-                    <a:lnB w="9525" cap="flat" cmpd="sng" algn="ctr">
-                      <a:solidFill>
-                        <a:srgbClr val="000000"/>
-                      </a:solidFill>
-                      <a:prstDash val="solid"/>
-                      <a:round/>
-                      <a:headEnd type="none" w="med" len="med"/>
-                      <a:tailEnd type="none" w="med" len="med"/>
-                    </a:lnB>
-                    <a:solidFill>
-                      <a:srgbClr val="CFD7E7"/>
-                    </a:solidFill>
-                  </a:tcPr>
-                </a:tc>
-                <a:tc>
-                  <a:txBody>
-                    <a:bodyPr/>
-                    <a:lstStyle/>
-                    <a:p>
-                      <a:pPr algn="l">
-                        <a:lnSpc>
-                          <a:spcPts val="2160"/>
-                        </a:lnSpc>
-                        <a:defRPr/>
-                      </a:pPr>
-                      <a:r>
-                        <a:rPr lang="en-US" sz="1800">
-                          <a:solidFill>
-                            <a:srgbClr val="000000"/>
-                          </a:solidFill>
-                          <a:latin typeface="Arimo"/>
-                          <a:ea typeface="Arimo"/>
-                          <a:cs typeface="Arimo"/>
-                          <a:sym typeface="Arimo"/>
-                        </a:rPr>
-                        <a:t>feat: Connect CoinGecko &amp; Yahoo Finance API</a:t>
-                      </a:r>
-                      <a:endParaRPr lang="en-US" sz="1100"/>
-                    </a:p>
-                  </a:txBody>
-                  <a:tcPr marL="63500" marR="63500" marT="63500" marB="63500" anchor="ctr">
-                    <a:lnL w="9525" cap="flat" cmpd="sng" algn="ctr">
-                      <a:solidFill>
-                        <a:srgbClr val="000000"/>
-                      </a:solidFill>
-                      <a:prstDash val="solid"/>
-                      <a:round/>
-                      <a:headEnd type="none" w="med" len="med"/>
-                      <a:tailEnd type="none" w="med" len="med"/>
-                    </a:lnL>
-                    <a:lnR w="9525" cap="flat" cmpd="sng" algn="ctr">
-                      <a:solidFill>
-                        <a:srgbClr val="000000"/>
-                      </a:solidFill>
-                      <a:prstDash val="solid"/>
-                      <a:round/>
-                      <a:headEnd type="none" w="med" len="med"/>
-                      <a:tailEnd type="none" w="med" len="med"/>
-                    </a:lnR>
-                    <a:lnT w="9525" cap="flat" cmpd="sng" algn="ctr">
-                      <a:solidFill>
-                        <a:srgbClr val="000000"/>
-                      </a:solidFill>
-                      <a:prstDash val="solid"/>
-                      <a:round/>
-                      <a:headEnd type="none" w="med" len="med"/>
-                      <a:tailEnd type="none" w="med" len="med"/>
-                    </a:lnT>
-                    <a:lnB w="9525" cap="flat" cmpd="sng" algn="ctr">
-                      <a:solidFill>
-                        <a:srgbClr val="000000"/>
-                      </a:solidFill>
-                      <a:prstDash val="solid"/>
-                      <a:round/>
-                      <a:headEnd type="none" w="med" len="med"/>
-                      <a:tailEnd type="none" w="med" len="med"/>
-                    </a:lnB>
-                    <a:solidFill>
-                      <a:srgbClr val="CFD7E7"/>
-                    </a:solidFill>
-                  </a:tcPr>
-                </a:tc>
-                <a:extLst>
-                  <a:ext uri="{0D108BD9-81ED-4DB2-BD59-A6C34878D82A}">
-                    <a16:rowId xmlns:a16="http://schemas.microsoft.com/office/drawing/2014/main" val="10001"/>
-                  </a:ext>
-                </a:extLst>
-              </a:tr>
-              <a:tr h="647700">
-                <a:tc>
-                  <a:txBody>
-                    <a:bodyPr/>
-                    <a:lstStyle/>
-                    <a:p>
-                      <a:pPr algn="l">
-                        <a:lnSpc>
-                          <a:spcPts val="2160"/>
-                        </a:lnSpc>
-                        <a:defRPr/>
-                      </a:pPr>
-                      <a:r>
-                        <a:rPr lang="en-US" sz="1800">
-                          <a:solidFill>
-                            <a:srgbClr val="000000"/>
-                          </a:solidFill>
-                          <a:latin typeface="Arimo"/>
-                          <a:ea typeface="Arimo"/>
-                          <a:cs typeface="Arimo"/>
-                          <a:sym typeface="Arimo"/>
-                        </a:rPr>
-                        <a:t>4d8f3e2</a:t>
-                      </a:r>
-                      <a:endParaRPr lang="en-US" sz="1100"/>
-                    </a:p>
-                  </a:txBody>
-                  <a:tcPr marL="63500" marR="63500" marT="63500" marB="63500" anchor="ctr">
-                    <a:lnL w="9525" cap="flat" cmpd="sng" algn="ctr">
-                      <a:solidFill>
-                        <a:srgbClr val="000000"/>
-                      </a:solidFill>
-                      <a:prstDash val="solid"/>
-                      <a:round/>
-                      <a:headEnd type="none" w="med" len="med"/>
-                      <a:tailEnd type="none" w="med" len="med"/>
-                    </a:lnL>
-                    <a:lnR w="9525" cap="flat" cmpd="sng" algn="ctr">
-                      <a:solidFill>
-                        <a:srgbClr val="000000"/>
-                      </a:solidFill>
-                      <a:prstDash val="solid"/>
-                      <a:round/>
-                      <a:headEnd type="none" w="med" len="med"/>
-                      <a:tailEnd type="none" w="med" len="med"/>
-                    </a:lnR>
-                    <a:lnT w="9525" cap="flat" cmpd="sng" algn="ctr">
-                      <a:solidFill>
-                        <a:srgbClr val="000000"/>
-                      </a:solidFill>
-                      <a:prstDash val="solid"/>
-                      <a:round/>
-                      <a:headEnd type="none" w="med" len="med"/>
-                      <a:tailEnd type="none" w="med" len="med"/>
-                    </a:lnT>
-                    <a:lnB w="9525" cap="flat" cmpd="sng" algn="ctr">
-                      <a:solidFill>
-                        <a:srgbClr val="000000"/>
-                      </a:solidFill>
-                      <a:prstDash val="solid"/>
-                      <a:round/>
-                      <a:headEnd type="none" w="med" len="med"/>
-                      <a:tailEnd type="none" w="med" len="med"/>
-                    </a:lnB>
-                    <a:solidFill>
-                      <a:srgbClr val="E8ECF4"/>
-                    </a:solidFill>
-                  </a:tcPr>
-                </a:tc>
-                <a:tc>
-                  <a:txBody>
-                    <a:bodyPr/>
-                    <a:lstStyle/>
-                    <a:p>
-                      <a:pPr algn="l">
-                        <a:lnSpc>
-                          <a:spcPts val="2160"/>
-                        </a:lnSpc>
-                        <a:defRPr/>
-                      </a:pPr>
-                      <a:r>
-                        <a:rPr lang="en-US" sz="1800">
-                          <a:solidFill>
-                            <a:srgbClr val="000000"/>
-                          </a:solidFill>
-                          <a:latin typeface="Arimo"/>
-                          <a:ea typeface="Arimo"/>
-                          <a:cs typeface="Arimo"/>
-                          <a:sym typeface="Arimo"/>
-                        </a:rPr>
-                        <a:t>2026-05-20</a:t>
-                      </a:r>
-                      <a:endParaRPr lang="en-US" sz="1100"/>
-                    </a:p>
-                  </a:txBody>
-                  <a:tcPr marL="63500" marR="63500" marT="63500" marB="63500" anchor="ctr">
-                    <a:lnL w="9525" cap="flat" cmpd="sng" algn="ctr">
-                      <a:solidFill>
-                        <a:srgbClr val="000000"/>
-                      </a:solidFill>
-                      <a:prstDash val="solid"/>
-                      <a:round/>
-                      <a:headEnd type="none" w="med" len="med"/>
-                      <a:tailEnd type="none" w="med" len="med"/>
-                    </a:lnL>
-                    <a:lnR w="9525" cap="flat" cmpd="sng" algn="ctr">
-                      <a:solidFill>
-                        <a:srgbClr val="000000"/>
-                      </a:solidFill>
-                      <a:prstDash val="solid"/>
-                      <a:round/>
-                      <a:headEnd type="none" w="med" len="med"/>
-                      <a:tailEnd type="none" w="med" len="med"/>
-                    </a:lnR>
-                    <a:lnT w="9525" cap="flat" cmpd="sng" algn="ctr">
-                      <a:solidFill>
-                        <a:srgbClr val="000000"/>
-                      </a:solidFill>
-                      <a:prstDash val="solid"/>
-                      <a:round/>
-                      <a:headEnd type="none" w="med" len="med"/>
-                      <a:tailEnd type="none" w="med" len="med"/>
-                    </a:lnT>
-                    <a:lnB w="9525" cap="flat" cmpd="sng" algn="ctr">
-                      <a:solidFill>
-                        <a:srgbClr val="000000"/>
-                      </a:solidFill>
-                      <a:prstDash val="solid"/>
-                      <a:round/>
-                      <a:headEnd type="none" w="med" len="med"/>
-                      <a:tailEnd type="none" w="med" len="med"/>
-                    </a:lnB>
-                    <a:solidFill>
-                      <a:srgbClr val="E8ECF4"/>
-                    </a:solidFill>
-                  </a:tcPr>
-                </a:tc>
-                <a:tc>
-                  <a:txBody>
-                    <a:bodyPr/>
-                    <a:lstStyle/>
-                    <a:p>
-                      <a:pPr algn="l">
-                        <a:lnSpc>
-                          <a:spcPts val="2160"/>
-                        </a:lnSpc>
-                        <a:defRPr/>
-                      </a:pPr>
-                      <a:r>
-                        <a:rPr lang="en-US" sz="1800">
-                          <a:solidFill>
-                            <a:srgbClr val="000000"/>
-                          </a:solidFill>
-                          <a:latin typeface="Arimo"/>
-                          <a:ea typeface="Arimo"/>
-                          <a:cs typeface="Arimo"/>
-                          <a:sym typeface="Arimo"/>
-                        </a:rPr>
-                        <a:t>refactor: Build Star Schema with Single Filter</a:t>
-                      </a:r>
-                      <a:endParaRPr lang="en-US" sz="1100"/>
-                    </a:p>
-                  </a:txBody>
-                  <a:tcPr marL="63500" marR="63500" marT="63500" marB="63500" anchor="ctr">
-                    <a:lnL w="9525" cap="flat" cmpd="sng" algn="ctr">
-                      <a:solidFill>
-                        <a:srgbClr val="000000"/>
-                      </a:solidFill>
-                      <a:prstDash val="solid"/>
-                      <a:round/>
-                      <a:headEnd type="none" w="med" len="med"/>
-                      <a:tailEnd type="none" w="med" len="med"/>
-                    </a:lnL>
-                    <a:lnR w="9525" cap="flat" cmpd="sng" algn="ctr">
-                      <a:solidFill>
-                        <a:srgbClr val="000000"/>
-                      </a:solidFill>
-                      <a:prstDash val="solid"/>
-                      <a:round/>
-                      <a:headEnd type="none" w="med" len="med"/>
-                      <a:tailEnd type="none" w="med" len="med"/>
-                    </a:lnR>
-                    <a:lnT w="9525" cap="flat" cmpd="sng" algn="ctr">
-                      <a:solidFill>
-                        <a:srgbClr val="000000"/>
-                      </a:solidFill>
-                      <a:prstDash val="solid"/>
-                      <a:round/>
-                      <a:headEnd type="none" w="med" len="med"/>
-                      <a:tailEnd type="none" w="med" len="med"/>
-                    </a:lnT>
-                    <a:lnB w="9525" cap="flat" cmpd="sng" algn="ctr">
-                      <a:solidFill>
-                        <a:srgbClr val="000000"/>
-                      </a:solidFill>
-                      <a:prstDash val="solid"/>
-                      <a:round/>
-                      <a:headEnd type="none" w="med" len="med"/>
-                      <a:tailEnd type="none" w="med" len="med"/>
-                    </a:lnB>
-                    <a:solidFill>
-                      <a:srgbClr val="E8ECF4"/>
-                    </a:solidFill>
-                  </a:tcPr>
-                </a:tc>
-                <a:extLst>
-                  <a:ext uri="{0D108BD9-81ED-4DB2-BD59-A6C34878D82A}">
-                    <a16:rowId xmlns:a16="http://schemas.microsoft.com/office/drawing/2014/main" val="10002"/>
-                  </a:ext>
-                </a:extLst>
-              </a:tr>
-              <a:tr h="647700">
-                <a:tc>
-                  <a:txBody>
-                    <a:bodyPr/>
-                    <a:lstStyle/>
-                    <a:p>
-                      <a:pPr algn="l">
-                        <a:lnSpc>
-                          <a:spcPts val="2160"/>
-                        </a:lnSpc>
-                        <a:defRPr/>
-                      </a:pPr>
-                      <a:r>
-                        <a:rPr lang="en-US" sz="1800">
-                          <a:solidFill>
-                            <a:srgbClr val="000000"/>
-                          </a:solidFill>
-                          <a:latin typeface="Arimo"/>
-                          <a:ea typeface="Arimo"/>
-                          <a:cs typeface="Arimo"/>
-                          <a:sym typeface="Arimo"/>
-                        </a:rPr>
-                        <a:t>b7c5a19</a:t>
-                      </a:r>
-                      <a:endParaRPr lang="en-US" sz="1100"/>
-                    </a:p>
-                  </a:txBody>
-                  <a:tcPr marL="63500" marR="63500" marT="63500" marB="63500" anchor="ctr">
-                    <a:lnL w="9525" cap="flat" cmpd="sng" algn="ctr">
-                      <a:solidFill>
-                        <a:srgbClr val="000000"/>
-                      </a:solidFill>
-                      <a:prstDash val="solid"/>
-                      <a:round/>
-                      <a:headEnd type="none" w="med" len="med"/>
-                      <a:tailEnd type="none" w="med" len="med"/>
-                    </a:lnL>
-                    <a:lnR w="9525" cap="flat" cmpd="sng" algn="ctr">
-                      <a:solidFill>
-                        <a:srgbClr val="000000"/>
-                      </a:solidFill>
-                      <a:prstDash val="solid"/>
-                      <a:round/>
-                      <a:headEnd type="none" w="med" len="med"/>
-                      <a:tailEnd type="none" w="med" len="med"/>
-                    </a:lnR>
-                    <a:lnT w="9525" cap="flat" cmpd="sng" algn="ctr">
-                      <a:solidFill>
-                        <a:srgbClr val="000000"/>
-                      </a:solidFill>
-                      <a:prstDash val="solid"/>
-                      <a:round/>
-                      <a:headEnd type="none" w="med" len="med"/>
-                      <a:tailEnd type="none" w="med" len="med"/>
-                    </a:lnT>
-                    <a:lnB w="9525" cap="flat" cmpd="sng" algn="ctr">
-                      <a:solidFill>
-                        <a:srgbClr val="000000"/>
-                      </a:solidFill>
-                      <a:prstDash val="solid"/>
-                      <a:round/>
-                      <a:headEnd type="none" w="med" len="med"/>
-                      <a:tailEnd type="none" w="med" len="med"/>
-                    </a:lnB>
-                    <a:solidFill>
-                      <a:srgbClr val="CFD7E7"/>
-                    </a:solidFill>
-                  </a:tcPr>
-                </a:tc>
-                <a:tc>
-                  <a:txBody>
-                    <a:bodyPr/>
-                    <a:lstStyle/>
-                    <a:p>
-                      <a:pPr algn="l">
-                        <a:lnSpc>
-                          <a:spcPts val="2160"/>
-                        </a:lnSpc>
-                        <a:defRPr/>
-                      </a:pPr>
-                      <a:r>
-                        <a:rPr lang="en-US" sz="1800">
-                          <a:solidFill>
-                            <a:srgbClr val="000000"/>
-                          </a:solidFill>
-                          <a:latin typeface="Arimo"/>
-                          <a:ea typeface="Arimo"/>
-                          <a:cs typeface="Arimo"/>
-                          <a:sym typeface="Arimo"/>
-                        </a:rPr>
-                        <a:t>2026-05-28</a:t>
-                      </a:r>
-                      <a:endParaRPr lang="en-US" sz="1100"/>
-                    </a:p>
-                  </a:txBody>
-                  <a:tcPr marL="63500" marR="63500" marT="63500" marB="63500" anchor="ctr">
-                    <a:lnL w="9525" cap="flat" cmpd="sng" algn="ctr">
-                      <a:solidFill>
-                        <a:srgbClr val="000000"/>
-                      </a:solidFill>
-                      <a:prstDash val="solid"/>
-                      <a:round/>
-                      <a:headEnd type="none" w="med" len="med"/>
-                      <a:tailEnd type="none" w="med" len="med"/>
-                    </a:lnL>
-                    <a:lnR w="9525" cap="flat" cmpd="sng" algn="ctr">
-                      <a:solidFill>
-                        <a:srgbClr val="000000"/>
-                      </a:solidFill>
-                      <a:prstDash val="solid"/>
-                      <a:round/>
-                      <a:headEnd type="none" w="med" len="med"/>
-                      <a:tailEnd type="none" w="med" len="med"/>
-                    </a:lnR>
-                    <a:lnT w="9525" cap="flat" cmpd="sng" algn="ctr">
-                      <a:solidFill>
-                        <a:srgbClr val="000000"/>
-                      </a:solidFill>
-                      <a:prstDash val="solid"/>
-                      <a:round/>
-                      <a:headEnd type="none" w="med" len="med"/>
-                      <a:tailEnd type="none" w="med" len="med"/>
-                    </a:lnT>
-                    <a:lnB w="9525" cap="flat" cmpd="sng" algn="ctr">
-                      <a:solidFill>
-                        <a:srgbClr val="000000"/>
-                      </a:solidFill>
-                      <a:prstDash val="solid"/>
-                      <a:round/>
-                      <a:headEnd type="none" w="med" len="med"/>
-                      <a:tailEnd type="none" w="med" len="med"/>
-                    </a:lnB>
-                    <a:solidFill>
-                      <a:srgbClr val="CFD7E7"/>
-                    </a:solidFill>
-                  </a:tcPr>
-                </a:tc>
-                <a:tc>
-                  <a:txBody>
-                    <a:bodyPr/>
-                    <a:lstStyle/>
-                    <a:p>
-                      <a:pPr algn="l">
-                        <a:lnSpc>
-                          <a:spcPts val="2160"/>
-                        </a:lnSpc>
-                        <a:defRPr/>
-                      </a:pPr>
-                      <a:r>
-                        <a:rPr lang="en-US" sz="1800">
-                          <a:solidFill>
-                            <a:srgbClr val="000000"/>
-                          </a:solidFill>
-                          <a:latin typeface="Arimo"/>
-                          <a:ea typeface="Arimo"/>
-                          <a:cs typeface="Arimo"/>
-                          <a:sym typeface="Arimo"/>
-                        </a:rPr>
-                        <a:t>feat: Implement Dynamic Pearson r Measure (DAX)</a:t>
-                      </a:r>
-                      <a:endParaRPr lang="en-US" sz="1100"/>
-                    </a:p>
-                  </a:txBody>
-                  <a:tcPr marL="63500" marR="63500" marT="63500" marB="63500" anchor="ctr">
-                    <a:lnL w="9525" cap="flat" cmpd="sng" algn="ctr">
-                      <a:solidFill>
-                        <a:srgbClr val="000000"/>
-                      </a:solidFill>
-                      <a:prstDash val="solid"/>
-                      <a:round/>
-                      <a:headEnd type="none" w="med" len="med"/>
-                      <a:tailEnd type="none" w="med" len="med"/>
-                    </a:lnL>
-                    <a:lnR w="9525" cap="flat" cmpd="sng" algn="ctr">
-                      <a:solidFill>
-                        <a:srgbClr val="000000"/>
-                      </a:solidFill>
-                      <a:prstDash val="solid"/>
-                      <a:round/>
-                      <a:headEnd type="none" w="med" len="med"/>
-                      <a:tailEnd type="none" w="med" len="med"/>
-                    </a:lnR>
-                    <a:lnT w="9525" cap="flat" cmpd="sng" algn="ctr">
-                      <a:solidFill>
-                        <a:srgbClr val="000000"/>
-                      </a:solidFill>
-                      <a:prstDash val="solid"/>
-                      <a:round/>
-                      <a:headEnd type="none" w="med" len="med"/>
-                      <a:tailEnd type="none" w="med" len="med"/>
-                    </a:lnT>
-                    <a:lnB w="9525" cap="flat" cmpd="sng" algn="ctr">
-                      <a:solidFill>
-                        <a:srgbClr val="000000"/>
-                      </a:solidFill>
-                      <a:prstDash val="solid"/>
-                      <a:round/>
-                      <a:headEnd type="none" w="med" len="med"/>
-                      <a:tailEnd type="none" w="med" len="med"/>
-                    </a:lnB>
-                    <a:solidFill>
-                      <a:srgbClr val="CFD7E7"/>
-                    </a:solidFill>
-                  </a:tcPr>
-                </a:tc>
-                <a:extLst>
-                  <a:ext uri="{0D108BD9-81ED-4DB2-BD59-A6C34878D82A}">
-                    <a16:rowId xmlns:a16="http://schemas.microsoft.com/office/drawing/2014/main" val="10003"/>
-                  </a:ext>
-                </a:extLst>
-              </a:tr>
-              <a:tr h="647700">
-                <a:tc>
-                  <a:txBody>
-                    <a:bodyPr/>
-                    <a:lstStyle/>
-                    <a:p>
-                      <a:pPr algn="l">
-                        <a:lnSpc>
-                          <a:spcPts val="2160"/>
-                        </a:lnSpc>
-                        <a:defRPr/>
-                      </a:pPr>
-                      <a:r>
-                        <a:rPr lang="en-US" sz="1800">
-                          <a:solidFill>
-                            <a:srgbClr val="000000"/>
-                          </a:solidFill>
-                          <a:latin typeface="Arimo"/>
-                          <a:ea typeface="Arimo"/>
-                          <a:cs typeface="Arimo"/>
-                          <a:sym typeface="Arimo"/>
-                        </a:rPr>
-                        <a:t>f2e4d61</a:t>
-                      </a:r>
-                      <a:endParaRPr lang="en-US" sz="1100"/>
-                    </a:p>
-                  </a:txBody>
-                  <a:tcPr marL="63500" marR="63500" marT="63500" marB="63500" anchor="ctr">
-                    <a:lnL w="9525" cap="flat" cmpd="sng" algn="ctr">
-                      <a:solidFill>
-                        <a:srgbClr val="000000"/>
-                      </a:solidFill>
-                      <a:prstDash val="solid"/>
-                      <a:round/>
-                      <a:headEnd type="none" w="med" len="med"/>
-                      <a:tailEnd type="none" w="med" len="med"/>
-                    </a:lnL>
-                    <a:lnR w="9525" cap="flat" cmpd="sng" algn="ctr">
-                      <a:solidFill>
-                        <a:srgbClr val="000000"/>
-                      </a:solidFill>
-                      <a:prstDash val="solid"/>
-                      <a:round/>
-                      <a:headEnd type="none" w="med" len="med"/>
-                      <a:tailEnd type="none" w="med" len="med"/>
-                    </a:lnR>
-                    <a:lnT w="9525" cap="flat" cmpd="sng" algn="ctr">
-                      <a:solidFill>
-                        <a:srgbClr val="000000"/>
-                      </a:solidFill>
-                      <a:prstDash val="solid"/>
-                      <a:round/>
-                      <a:headEnd type="none" w="med" len="med"/>
-                      <a:tailEnd type="none" w="med" len="med"/>
-                    </a:lnT>
-                    <a:lnB w="9525" cap="flat" cmpd="sng" algn="ctr">
-                      <a:solidFill>
-                        <a:srgbClr val="000000"/>
-                      </a:solidFill>
-                      <a:prstDash val="solid"/>
-                      <a:round/>
-                      <a:headEnd type="none" w="med" len="med"/>
-                      <a:tailEnd type="none" w="med" len="med"/>
-                    </a:lnB>
-                    <a:solidFill>
-                      <a:srgbClr val="E8ECF4"/>
-                    </a:solidFill>
-                  </a:tcPr>
-                </a:tc>
-                <a:tc>
-                  <a:txBody>
-                    <a:bodyPr/>
-                    <a:lstStyle/>
-                    <a:p>
-                      <a:pPr algn="l">
-                        <a:lnSpc>
-                          <a:spcPts val="2160"/>
-                        </a:lnSpc>
-                        <a:defRPr/>
-                      </a:pPr>
-                      <a:r>
-                        <a:rPr lang="en-US" sz="1800">
-                          <a:solidFill>
-                            <a:srgbClr val="000000"/>
-                          </a:solidFill>
-                          <a:latin typeface="Arimo"/>
-                          <a:ea typeface="Arimo"/>
-                          <a:cs typeface="Arimo"/>
-                          <a:sym typeface="Arimo"/>
-                        </a:rPr>
-                        <a:t>2026-06-05</a:t>
-                      </a:r>
-                      <a:endParaRPr lang="en-US" sz="1100"/>
-                    </a:p>
-                  </a:txBody>
-                  <a:tcPr marL="63500" marR="63500" marT="63500" marB="63500" anchor="ctr">
-                    <a:lnL w="9525" cap="flat" cmpd="sng" algn="ctr">
-                      <a:solidFill>
-                        <a:srgbClr val="000000"/>
-                      </a:solidFill>
-                      <a:prstDash val="solid"/>
-                      <a:round/>
-                      <a:headEnd type="none" w="med" len="med"/>
-                      <a:tailEnd type="none" w="med" len="med"/>
-                    </a:lnL>
-                    <a:lnR w="9525" cap="flat" cmpd="sng" algn="ctr">
-                      <a:solidFill>
-                        <a:srgbClr val="000000"/>
-                      </a:solidFill>
-                      <a:prstDash val="solid"/>
-                      <a:round/>
-                      <a:headEnd type="none" w="med" len="med"/>
-                      <a:tailEnd type="none" w="med" len="med"/>
-                    </a:lnR>
-                    <a:lnT w="9525" cap="flat" cmpd="sng" algn="ctr">
-                      <a:solidFill>
-                        <a:srgbClr val="000000"/>
-                      </a:solidFill>
-                      <a:prstDash val="solid"/>
-                      <a:round/>
-                      <a:headEnd type="none" w="med" len="med"/>
-                      <a:tailEnd type="none" w="med" len="med"/>
-                    </a:lnT>
-                    <a:lnB w="9525" cap="flat" cmpd="sng" algn="ctr">
-                      <a:solidFill>
-                        <a:srgbClr val="000000"/>
-                      </a:solidFill>
-                      <a:prstDash val="solid"/>
-                      <a:round/>
-                      <a:headEnd type="none" w="med" len="med"/>
-                      <a:tailEnd type="none" w="med" len="med"/>
-                    </a:lnB>
-                    <a:solidFill>
-                      <a:srgbClr val="E8ECF4"/>
-                    </a:solidFill>
-                  </a:tcPr>
-                </a:tc>
-                <a:tc>
-                  <a:txBody>
-                    <a:bodyPr/>
-                    <a:lstStyle/>
-                    <a:p>
-                      <a:pPr algn="l">
-                        <a:lnSpc>
-                          <a:spcPts val="2160"/>
-                        </a:lnSpc>
-                        <a:defRPr/>
-                      </a:pPr>
-                      <a:r>
-                        <a:rPr lang="en-US" sz="1800">
-                          <a:solidFill>
-                            <a:srgbClr val="000000"/>
-                          </a:solidFill>
-                          <a:latin typeface="Arimo"/>
-                          <a:ea typeface="Arimo"/>
-                          <a:cs typeface="Arimo"/>
-                          <a:sym typeface="Arimo"/>
-                        </a:rPr>
-                        <a:t>style: Optimize Dual-Axis visuals and KPI layout</a:t>
-                      </a:r>
-                      <a:endParaRPr lang="en-US" sz="1100"/>
-                    </a:p>
-                  </a:txBody>
-                  <a:tcPr marL="63500" marR="63500" marT="63500" marB="63500" anchor="ctr">
-                    <a:lnL w="9525" cap="flat" cmpd="sng" algn="ctr">
-                      <a:solidFill>
-                        <a:srgbClr val="000000"/>
-                      </a:solidFill>
-                      <a:prstDash val="solid"/>
-                      <a:round/>
-                      <a:headEnd type="none" w="med" len="med"/>
-                      <a:tailEnd type="none" w="med" len="med"/>
-                    </a:lnL>
-                    <a:lnR w="9525" cap="flat" cmpd="sng" algn="ctr">
-                      <a:solidFill>
-                        <a:srgbClr val="000000"/>
-                      </a:solidFill>
-                      <a:prstDash val="solid"/>
-                      <a:round/>
-                      <a:headEnd type="none" w="med" len="med"/>
-                      <a:tailEnd type="none" w="med" len="med"/>
-                    </a:lnR>
-                    <a:lnT w="9525" cap="flat" cmpd="sng" algn="ctr">
-                      <a:solidFill>
-                        <a:srgbClr val="000000"/>
-                      </a:solidFill>
-                      <a:prstDash val="solid"/>
-                      <a:round/>
-                      <a:headEnd type="none" w="med" len="med"/>
-                      <a:tailEnd type="none" w="med" len="med"/>
-                    </a:lnT>
-                    <a:lnB w="9525" cap="flat" cmpd="sng" algn="ctr">
-                      <a:solidFill>
-                        <a:srgbClr val="000000"/>
-                      </a:solidFill>
-                      <a:prstDash val="solid"/>
-                      <a:round/>
-                      <a:headEnd type="none" w="med" len="med"/>
-                      <a:tailEnd type="none" w="med" len="med"/>
-                    </a:lnB>
-                    <a:solidFill>
-                      <a:srgbClr val="E8ECF4"/>
-                    </a:solidFill>
-                  </a:tcPr>
-                </a:tc>
-                <a:extLst>
-                  <a:ext uri="{0D108BD9-81ED-4DB2-BD59-A6C34878D82A}">
-                    <a16:rowId xmlns:a16="http://schemas.microsoft.com/office/drawing/2014/main" val="10004"/>
-                  </a:ext>
-                </a:extLst>
-              </a:tr>
-            </a:tbl>
-          </a:graphicData>
-        </a:graphic>
-      </p:graphicFrame>
-      <p:sp>
-        <p:nvSpPr>
-          <p:cNvPr id="8" name="TextBox 8"/>
-          <p:cNvSpPr txBox="1"/>
-          <p:nvPr/>
-        </p:nvSpPr>
-        <p:spPr>
-          <a:xfrm>
-            <a:off x="857250" y="7683246"/>
-            <a:ext cx="16573500" cy="404813"/>
-          </a:xfrm>
-          <a:prstGeom prst="rect">
-            <a:avLst/>
-          </a:prstGeom>
-        </p:spPr>
-        <p:txBody>
-          <a:bodyPr lIns="0" tIns="0" rIns="0" bIns="0" rtlCol="0" anchor="t">
-            <a:spAutoFit/>
-          </a:bodyPr>
-          <a:lstStyle/>
-          <a:p>
-            <a:pPr algn="l">
-              <a:lnSpc>
-                <a:spcPts val="2835"/>
-              </a:lnSpc>
-            </a:pPr>
-            <a:r>
-              <a:rPr lang="en-US" sz="1575">
-                <a:solidFill>
-                  <a:srgbClr val="94A3B8"/>
-                </a:solidFill>
-                <a:latin typeface="Arimo"/>
-                <a:ea typeface="Arimo"/>
-                <a:cs typeface="Arimo"/>
-                <a:sym typeface="Arimo"/>
-              </a:rPr>
-              <a:t>* 以上紀錄為專案開發之版本演進歷程。</a:t>
-            </a:r>
-          </a:p>
-        </p:txBody>
-      </p:sp>
-      <p:grpSp>
-        <p:nvGrpSpPr>
-          <p:cNvPr id="9" name="Group 9"/>
-          <p:cNvGrpSpPr/>
-          <p:nvPr/>
-        </p:nvGrpSpPr>
-        <p:grpSpPr>
-          <a:xfrm>
-            <a:off x="857250" y="4830508"/>
-            <a:ext cx="2914431" cy="28575"/>
-            <a:chOff x="0" y="0"/>
-            <a:chExt cx="3885908" cy="38100"/>
-          </a:xfrm>
-        </p:grpSpPr>
-        <p:sp>
-          <p:nvSpPr>
-            <p:cNvPr id="10" name="Freeform 10"/>
-            <p:cNvSpPr/>
-            <p:nvPr/>
-          </p:nvSpPr>
-          <p:spPr>
-            <a:xfrm>
-              <a:off x="0" y="0"/>
-              <a:ext cx="3885946" cy="38100"/>
-            </a:xfrm>
-            <a:custGeom>
-              <a:avLst/>
-              <a:gdLst/>
-              <a:ahLst/>
-              <a:cxnLst/>
-              <a:rect l="l" t="t" r="r" b="b"/>
-              <a:pathLst>
-                <a:path w="3885946" h="38100">
-                  <a:moveTo>
-                    <a:pt x="0" y="0"/>
-                  </a:moveTo>
-                  <a:lnTo>
-                    <a:pt x="3885946" y="0"/>
-                  </a:lnTo>
-                  <a:lnTo>
-                    <a:pt x="3885946" y="38100"/>
-                  </a:lnTo>
-                  <a:lnTo>
-                    <a:pt x="0" y="38100"/>
-                  </a:lnTo>
-                  <a:close/>
-                </a:path>
-              </a:pathLst>
-            </a:custGeom>
-            <a:solidFill>
-              <a:srgbClr val="E2E8F0"/>
-            </a:solidFill>
-          </p:spPr>
-          <p:txBody>
-            <a:bodyPr/>
-            <a:lstStyle/>
-            <a:p>
-              <a:endParaRPr lang="zh-TW" altLang="en-US"/>
-            </a:p>
-          </p:txBody>
-        </p:sp>
-      </p:grpSp>
-      <p:grpSp>
-        <p:nvGrpSpPr>
-          <p:cNvPr id="11" name="Group 11"/>
-          <p:cNvGrpSpPr/>
-          <p:nvPr/>
-        </p:nvGrpSpPr>
-        <p:grpSpPr>
-          <a:xfrm>
-            <a:off x="3771681" y="4830508"/>
-            <a:ext cx="2696985" cy="28575"/>
-            <a:chOff x="0" y="0"/>
-            <a:chExt cx="3595980" cy="38100"/>
-          </a:xfrm>
-        </p:grpSpPr>
-        <p:sp>
-          <p:nvSpPr>
-            <p:cNvPr id="12" name="Freeform 12"/>
-            <p:cNvSpPr/>
-            <p:nvPr/>
-          </p:nvSpPr>
-          <p:spPr>
-            <a:xfrm>
-              <a:off x="0" y="0"/>
-              <a:ext cx="3596005" cy="38100"/>
-            </a:xfrm>
-            <a:custGeom>
-              <a:avLst/>
-              <a:gdLst/>
-              <a:ahLst/>
-              <a:cxnLst/>
-              <a:rect l="l" t="t" r="r" b="b"/>
-              <a:pathLst>
-                <a:path w="3596005" h="38100">
-                  <a:moveTo>
-                    <a:pt x="0" y="0"/>
-                  </a:moveTo>
-                  <a:lnTo>
-                    <a:pt x="3596005" y="0"/>
-                  </a:lnTo>
-                  <a:lnTo>
-                    <a:pt x="3596005" y="38100"/>
-                  </a:lnTo>
-                  <a:lnTo>
-                    <a:pt x="0" y="38100"/>
-                  </a:lnTo>
-                  <a:close/>
-                </a:path>
-              </a:pathLst>
-            </a:custGeom>
-            <a:solidFill>
-              <a:srgbClr val="E2E8F0"/>
-            </a:solidFill>
-          </p:spPr>
-          <p:txBody>
-            <a:bodyPr/>
-            <a:lstStyle/>
-            <a:p>
-              <a:endParaRPr lang="zh-TW" altLang="en-US"/>
-            </a:p>
-          </p:txBody>
-        </p:sp>
-      </p:grpSp>
-      <p:grpSp>
-        <p:nvGrpSpPr>
-          <p:cNvPr id="13" name="Group 13"/>
-          <p:cNvGrpSpPr/>
-          <p:nvPr/>
-        </p:nvGrpSpPr>
-        <p:grpSpPr>
-          <a:xfrm>
-            <a:off x="6468666" y="4830508"/>
-            <a:ext cx="10962084" cy="28575"/>
-            <a:chOff x="0" y="0"/>
-            <a:chExt cx="14616112" cy="38100"/>
-          </a:xfrm>
-        </p:grpSpPr>
-        <p:sp>
-          <p:nvSpPr>
-            <p:cNvPr id="14" name="Freeform 14"/>
-            <p:cNvSpPr/>
-            <p:nvPr/>
-          </p:nvSpPr>
-          <p:spPr>
-            <a:xfrm>
-              <a:off x="0" y="0"/>
-              <a:ext cx="14616049" cy="38100"/>
-            </a:xfrm>
-            <a:custGeom>
-              <a:avLst/>
-              <a:gdLst/>
-              <a:ahLst/>
-              <a:cxnLst/>
-              <a:rect l="l" t="t" r="r" b="b"/>
-              <a:pathLst>
-                <a:path w="14616049" h="38100">
-                  <a:moveTo>
-                    <a:pt x="0" y="0"/>
-                  </a:moveTo>
-                  <a:lnTo>
-                    <a:pt x="14616049" y="0"/>
-                  </a:lnTo>
-                  <a:lnTo>
-                    <a:pt x="14616049" y="38100"/>
-                  </a:lnTo>
-                  <a:lnTo>
-                    <a:pt x="0" y="38100"/>
-                  </a:lnTo>
-                  <a:close/>
-                </a:path>
-              </a:pathLst>
-            </a:custGeom>
-            <a:solidFill>
-              <a:srgbClr val="E2E8F0"/>
-            </a:solidFill>
-          </p:spPr>
-          <p:txBody>
-            <a:bodyPr/>
-            <a:lstStyle/>
-            <a:p>
-              <a:endParaRPr lang="zh-TW" altLang="en-US"/>
-            </a:p>
-          </p:txBody>
-        </p:sp>
-      </p:grpSp>
-      <p:grpSp>
-        <p:nvGrpSpPr>
-          <p:cNvPr id="15" name="Group 15"/>
-          <p:cNvGrpSpPr/>
-          <p:nvPr/>
-        </p:nvGrpSpPr>
-        <p:grpSpPr>
-          <a:xfrm>
-            <a:off x="857250" y="5509174"/>
-            <a:ext cx="2914431" cy="14288"/>
-            <a:chOff x="0" y="0"/>
-            <a:chExt cx="3885908" cy="19050"/>
-          </a:xfrm>
-        </p:grpSpPr>
-        <p:sp>
-          <p:nvSpPr>
-            <p:cNvPr id="16" name="Freeform 16"/>
-            <p:cNvSpPr/>
-            <p:nvPr/>
-          </p:nvSpPr>
-          <p:spPr>
-            <a:xfrm>
-              <a:off x="0" y="0"/>
-              <a:ext cx="3885946" cy="19050"/>
-            </a:xfrm>
-            <a:custGeom>
-              <a:avLst/>
-              <a:gdLst/>
-              <a:ahLst/>
-              <a:cxnLst/>
-              <a:rect l="l" t="t" r="r" b="b"/>
-              <a:pathLst>
-                <a:path w="3885946" h="19050">
-                  <a:moveTo>
-                    <a:pt x="0" y="0"/>
-                  </a:moveTo>
-                  <a:lnTo>
-                    <a:pt x="3885946" y="0"/>
-                  </a:lnTo>
-                  <a:lnTo>
-                    <a:pt x="3885946" y="19050"/>
-                  </a:lnTo>
-                  <a:lnTo>
-                    <a:pt x="0" y="19050"/>
-                  </a:lnTo>
-                  <a:close/>
-                </a:path>
-              </a:pathLst>
-            </a:custGeom>
-            <a:solidFill>
-              <a:srgbClr val="F1F5F9"/>
-            </a:solidFill>
-          </p:spPr>
-          <p:txBody>
-            <a:bodyPr/>
-            <a:lstStyle/>
-            <a:p>
-              <a:endParaRPr lang="zh-TW" altLang="en-US"/>
-            </a:p>
-          </p:txBody>
-        </p:sp>
-      </p:grpSp>
-      <p:grpSp>
-        <p:nvGrpSpPr>
-          <p:cNvPr id="17" name="Group 17"/>
-          <p:cNvGrpSpPr/>
-          <p:nvPr/>
-        </p:nvGrpSpPr>
-        <p:grpSpPr>
-          <a:xfrm>
-            <a:off x="3771681" y="5509174"/>
-            <a:ext cx="2696985" cy="14288"/>
-            <a:chOff x="0" y="0"/>
-            <a:chExt cx="3595980" cy="19050"/>
-          </a:xfrm>
-        </p:grpSpPr>
-        <p:sp>
-          <p:nvSpPr>
-            <p:cNvPr id="18" name="Freeform 18"/>
-            <p:cNvSpPr/>
-            <p:nvPr/>
-          </p:nvSpPr>
-          <p:spPr>
-            <a:xfrm>
-              <a:off x="0" y="0"/>
-              <a:ext cx="3596005" cy="19050"/>
-            </a:xfrm>
-            <a:custGeom>
-              <a:avLst/>
-              <a:gdLst/>
-              <a:ahLst/>
-              <a:cxnLst/>
-              <a:rect l="l" t="t" r="r" b="b"/>
-              <a:pathLst>
-                <a:path w="3596005" h="19050">
-                  <a:moveTo>
-                    <a:pt x="0" y="0"/>
-                  </a:moveTo>
-                  <a:lnTo>
-                    <a:pt x="3596005" y="0"/>
-                  </a:lnTo>
-                  <a:lnTo>
-                    <a:pt x="3596005" y="19050"/>
-                  </a:lnTo>
-                  <a:lnTo>
-                    <a:pt x="0" y="19050"/>
-                  </a:lnTo>
-                  <a:close/>
-                </a:path>
-              </a:pathLst>
-            </a:custGeom>
-            <a:solidFill>
-              <a:srgbClr val="F1F5F9"/>
-            </a:solidFill>
-          </p:spPr>
-          <p:txBody>
-            <a:bodyPr/>
-            <a:lstStyle/>
-            <a:p>
-              <a:endParaRPr lang="zh-TW" altLang="en-US"/>
-            </a:p>
-          </p:txBody>
-        </p:sp>
-      </p:grpSp>
-      <p:grpSp>
-        <p:nvGrpSpPr>
-          <p:cNvPr id="19" name="Group 19"/>
-          <p:cNvGrpSpPr/>
-          <p:nvPr/>
-        </p:nvGrpSpPr>
-        <p:grpSpPr>
-          <a:xfrm>
-            <a:off x="6468666" y="5509174"/>
-            <a:ext cx="10962084" cy="14288"/>
-            <a:chOff x="0" y="0"/>
-            <a:chExt cx="14616112" cy="19050"/>
-          </a:xfrm>
-        </p:grpSpPr>
-        <p:sp>
-          <p:nvSpPr>
-            <p:cNvPr id="20" name="Freeform 20"/>
-            <p:cNvSpPr/>
-            <p:nvPr/>
-          </p:nvSpPr>
-          <p:spPr>
-            <a:xfrm>
-              <a:off x="0" y="0"/>
-              <a:ext cx="14616049" cy="19050"/>
-            </a:xfrm>
-            <a:custGeom>
-              <a:avLst/>
-              <a:gdLst/>
-              <a:ahLst/>
-              <a:cxnLst/>
-              <a:rect l="l" t="t" r="r" b="b"/>
-              <a:pathLst>
-                <a:path w="14616049" h="19050">
-                  <a:moveTo>
-                    <a:pt x="0" y="0"/>
-                  </a:moveTo>
-                  <a:lnTo>
-                    <a:pt x="14616049" y="0"/>
-                  </a:lnTo>
-                  <a:lnTo>
-                    <a:pt x="14616049" y="19050"/>
-                  </a:lnTo>
-                  <a:lnTo>
-                    <a:pt x="0" y="19050"/>
-                  </a:lnTo>
-                  <a:close/>
-                </a:path>
-              </a:pathLst>
-            </a:custGeom>
-            <a:solidFill>
-              <a:srgbClr val="F1F5F9"/>
-            </a:solidFill>
-          </p:spPr>
-          <p:txBody>
-            <a:bodyPr/>
-            <a:lstStyle/>
-            <a:p>
-              <a:endParaRPr lang="zh-TW" altLang="en-US"/>
-            </a:p>
-          </p:txBody>
-        </p:sp>
-      </p:grpSp>
-      <p:grpSp>
-        <p:nvGrpSpPr>
-          <p:cNvPr id="21" name="Group 21"/>
-          <p:cNvGrpSpPr/>
-          <p:nvPr/>
-        </p:nvGrpSpPr>
-        <p:grpSpPr>
-          <a:xfrm>
-            <a:off x="857250" y="6166399"/>
-            <a:ext cx="2914431" cy="14288"/>
-            <a:chOff x="0" y="0"/>
-            <a:chExt cx="3885908" cy="19050"/>
-          </a:xfrm>
-        </p:grpSpPr>
-        <p:sp>
-          <p:nvSpPr>
-            <p:cNvPr id="22" name="Freeform 22"/>
-            <p:cNvSpPr/>
-            <p:nvPr/>
-          </p:nvSpPr>
-          <p:spPr>
-            <a:xfrm>
-              <a:off x="0" y="0"/>
-              <a:ext cx="3885946" cy="19050"/>
-            </a:xfrm>
-            <a:custGeom>
-              <a:avLst/>
-              <a:gdLst/>
-              <a:ahLst/>
-              <a:cxnLst/>
-              <a:rect l="l" t="t" r="r" b="b"/>
-              <a:pathLst>
-                <a:path w="3885946" h="19050">
-                  <a:moveTo>
-                    <a:pt x="0" y="0"/>
-                  </a:moveTo>
-                  <a:lnTo>
-                    <a:pt x="3885946" y="0"/>
-                  </a:lnTo>
-                  <a:lnTo>
-                    <a:pt x="3885946" y="19050"/>
-                  </a:lnTo>
-                  <a:lnTo>
-                    <a:pt x="0" y="19050"/>
-                  </a:lnTo>
-                  <a:close/>
-                </a:path>
-              </a:pathLst>
-            </a:custGeom>
-            <a:solidFill>
-              <a:srgbClr val="F1F5F9"/>
-            </a:solidFill>
-          </p:spPr>
-          <p:txBody>
-            <a:bodyPr/>
-            <a:lstStyle/>
-            <a:p>
-              <a:endParaRPr lang="zh-TW" altLang="en-US"/>
-            </a:p>
-          </p:txBody>
-        </p:sp>
-      </p:grpSp>
-      <p:grpSp>
-        <p:nvGrpSpPr>
-          <p:cNvPr id="23" name="Group 23"/>
-          <p:cNvGrpSpPr/>
-          <p:nvPr/>
-        </p:nvGrpSpPr>
-        <p:grpSpPr>
-          <a:xfrm>
-            <a:off x="3771681" y="6166399"/>
-            <a:ext cx="2696985" cy="14288"/>
-            <a:chOff x="0" y="0"/>
-            <a:chExt cx="3595980" cy="19050"/>
-          </a:xfrm>
-        </p:grpSpPr>
-        <p:sp>
-          <p:nvSpPr>
-            <p:cNvPr id="24" name="Freeform 24"/>
-            <p:cNvSpPr/>
-            <p:nvPr/>
-          </p:nvSpPr>
-          <p:spPr>
-            <a:xfrm>
-              <a:off x="0" y="0"/>
-              <a:ext cx="3596005" cy="19050"/>
-            </a:xfrm>
-            <a:custGeom>
-              <a:avLst/>
-              <a:gdLst/>
-              <a:ahLst/>
-              <a:cxnLst/>
-              <a:rect l="l" t="t" r="r" b="b"/>
-              <a:pathLst>
-                <a:path w="3596005" h="19050">
-                  <a:moveTo>
-                    <a:pt x="0" y="0"/>
-                  </a:moveTo>
-                  <a:lnTo>
-                    <a:pt x="3596005" y="0"/>
-                  </a:lnTo>
-                  <a:lnTo>
-                    <a:pt x="3596005" y="19050"/>
-                  </a:lnTo>
-                  <a:lnTo>
-                    <a:pt x="0" y="19050"/>
-                  </a:lnTo>
-                  <a:close/>
-                </a:path>
-              </a:pathLst>
-            </a:custGeom>
-            <a:solidFill>
-              <a:srgbClr val="F1F5F9"/>
-            </a:solidFill>
-          </p:spPr>
-          <p:txBody>
-            <a:bodyPr/>
-            <a:lstStyle/>
-            <a:p>
-              <a:endParaRPr lang="zh-TW" altLang="en-US"/>
-            </a:p>
-          </p:txBody>
-        </p:sp>
-      </p:grpSp>
-      <p:grpSp>
-        <p:nvGrpSpPr>
-          <p:cNvPr id="25" name="Group 25"/>
-          <p:cNvGrpSpPr/>
-          <p:nvPr/>
-        </p:nvGrpSpPr>
-        <p:grpSpPr>
-          <a:xfrm>
-            <a:off x="6468666" y="6166399"/>
-            <a:ext cx="10962084" cy="14288"/>
-            <a:chOff x="0" y="0"/>
-            <a:chExt cx="14616112" cy="19050"/>
-          </a:xfrm>
-        </p:grpSpPr>
-        <p:sp>
-          <p:nvSpPr>
-            <p:cNvPr id="26" name="Freeform 26"/>
-            <p:cNvSpPr/>
-            <p:nvPr/>
-          </p:nvSpPr>
-          <p:spPr>
-            <a:xfrm>
-              <a:off x="0" y="0"/>
-              <a:ext cx="14616049" cy="19050"/>
-            </a:xfrm>
-            <a:custGeom>
-              <a:avLst/>
-              <a:gdLst/>
-              <a:ahLst/>
-              <a:cxnLst/>
-              <a:rect l="l" t="t" r="r" b="b"/>
-              <a:pathLst>
-                <a:path w="14616049" h="19050">
-                  <a:moveTo>
-                    <a:pt x="0" y="0"/>
-                  </a:moveTo>
-                  <a:lnTo>
-                    <a:pt x="14616049" y="0"/>
-                  </a:lnTo>
-                  <a:lnTo>
-                    <a:pt x="14616049" y="19050"/>
-                  </a:lnTo>
-                  <a:lnTo>
-                    <a:pt x="0" y="19050"/>
-                  </a:lnTo>
-                  <a:close/>
-                </a:path>
-              </a:pathLst>
-            </a:custGeom>
-            <a:solidFill>
-              <a:srgbClr val="F1F5F9"/>
-            </a:solidFill>
-          </p:spPr>
-          <p:txBody>
-            <a:bodyPr/>
-            <a:lstStyle/>
-            <a:p>
-              <a:endParaRPr lang="zh-TW" altLang="en-US"/>
-            </a:p>
-          </p:txBody>
-        </p:sp>
-      </p:grpSp>
-      <p:grpSp>
-        <p:nvGrpSpPr>
-          <p:cNvPr id="27" name="Group 27"/>
-          <p:cNvGrpSpPr/>
-          <p:nvPr/>
-        </p:nvGrpSpPr>
-        <p:grpSpPr>
-          <a:xfrm>
-            <a:off x="857250" y="6823624"/>
-            <a:ext cx="2914431" cy="14288"/>
-            <a:chOff x="0" y="0"/>
-            <a:chExt cx="3885908" cy="19050"/>
-          </a:xfrm>
-        </p:grpSpPr>
-        <p:sp>
-          <p:nvSpPr>
-            <p:cNvPr id="28" name="Freeform 28"/>
-            <p:cNvSpPr/>
-            <p:nvPr/>
-          </p:nvSpPr>
-          <p:spPr>
-            <a:xfrm>
-              <a:off x="0" y="0"/>
-              <a:ext cx="3885946" cy="19050"/>
-            </a:xfrm>
-            <a:custGeom>
-              <a:avLst/>
-              <a:gdLst/>
-              <a:ahLst/>
-              <a:cxnLst/>
-              <a:rect l="l" t="t" r="r" b="b"/>
-              <a:pathLst>
-                <a:path w="3885946" h="19050">
-                  <a:moveTo>
-                    <a:pt x="0" y="0"/>
-                  </a:moveTo>
-                  <a:lnTo>
-                    <a:pt x="3885946" y="0"/>
-                  </a:lnTo>
-                  <a:lnTo>
-                    <a:pt x="3885946" y="19050"/>
-                  </a:lnTo>
-                  <a:lnTo>
-                    <a:pt x="0" y="19050"/>
-                  </a:lnTo>
-                  <a:close/>
-                </a:path>
-              </a:pathLst>
-            </a:custGeom>
-            <a:solidFill>
-              <a:srgbClr val="F1F5F9"/>
-            </a:solidFill>
-          </p:spPr>
-          <p:txBody>
-            <a:bodyPr/>
-            <a:lstStyle/>
-            <a:p>
-              <a:endParaRPr lang="zh-TW" altLang="en-US"/>
-            </a:p>
-          </p:txBody>
-        </p:sp>
-      </p:grpSp>
-      <p:grpSp>
-        <p:nvGrpSpPr>
-          <p:cNvPr id="29" name="Group 29"/>
-          <p:cNvGrpSpPr/>
-          <p:nvPr/>
-        </p:nvGrpSpPr>
-        <p:grpSpPr>
-          <a:xfrm>
-            <a:off x="3771681" y="6823624"/>
-            <a:ext cx="2696985" cy="14288"/>
-            <a:chOff x="0" y="0"/>
-            <a:chExt cx="3595980" cy="19050"/>
-          </a:xfrm>
-        </p:grpSpPr>
-        <p:sp>
-          <p:nvSpPr>
-            <p:cNvPr id="30" name="Freeform 30"/>
-            <p:cNvSpPr/>
-            <p:nvPr/>
-          </p:nvSpPr>
-          <p:spPr>
-            <a:xfrm>
-              <a:off x="0" y="0"/>
-              <a:ext cx="3596005" cy="19050"/>
-            </a:xfrm>
-            <a:custGeom>
-              <a:avLst/>
-              <a:gdLst/>
-              <a:ahLst/>
-              <a:cxnLst/>
-              <a:rect l="l" t="t" r="r" b="b"/>
-              <a:pathLst>
-                <a:path w="3596005" h="19050">
-                  <a:moveTo>
-                    <a:pt x="0" y="0"/>
-                  </a:moveTo>
-                  <a:lnTo>
-                    <a:pt x="3596005" y="0"/>
-                  </a:lnTo>
-                  <a:lnTo>
-                    <a:pt x="3596005" y="19050"/>
-                  </a:lnTo>
-                  <a:lnTo>
-                    <a:pt x="0" y="19050"/>
-                  </a:lnTo>
-                  <a:close/>
-                </a:path>
-              </a:pathLst>
-            </a:custGeom>
-            <a:solidFill>
-              <a:srgbClr val="F1F5F9"/>
-            </a:solidFill>
-          </p:spPr>
-          <p:txBody>
-            <a:bodyPr/>
-            <a:lstStyle/>
-            <a:p>
-              <a:endParaRPr lang="zh-TW" altLang="en-US"/>
-            </a:p>
-          </p:txBody>
-        </p:sp>
-      </p:grpSp>
-      <p:grpSp>
-        <p:nvGrpSpPr>
-          <p:cNvPr id="31" name="Group 31"/>
-          <p:cNvGrpSpPr/>
-          <p:nvPr/>
-        </p:nvGrpSpPr>
-        <p:grpSpPr>
-          <a:xfrm>
-            <a:off x="6468666" y="6823624"/>
-            <a:ext cx="10962084" cy="14288"/>
-            <a:chOff x="0" y="0"/>
-            <a:chExt cx="14616112" cy="19050"/>
-          </a:xfrm>
-        </p:grpSpPr>
-        <p:sp>
-          <p:nvSpPr>
-            <p:cNvPr id="32" name="Freeform 32"/>
-            <p:cNvSpPr/>
-            <p:nvPr/>
-          </p:nvSpPr>
-          <p:spPr>
-            <a:xfrm>
-              <a:off x="0" y="0"/>
-              <a:ext cx="14616049" cy="19050"/>
-            </a:xfrm>
-            <a:custGeom>
-              <a:avLst/>
-              <a:gdLst/>
-              <a:ahLst/>
-              <a:cxnLst/>
-              <a:rect l="l" t="t" r="r" b="b"/>
-              <a:pathLst>
-                <a:path w="14616049" h="19050">
-                  <a:moveTo>
-                    <a:pt x="0" y="0"/>
-                  </a:moveTo>
-                  <a:lnTo>
-                    <a:pt x="14616049" y="0"/>
-                  </a:lnTo>
-                  <a:lnTo>
-                    <a:pt x="14616049" y="19050"/>
-                  </a:lnTo>
-                  <a:lnTo>
-                    <a:pt x="0" y="19050"/>
-                  </a:lnTo>
-                  <a:close/>
-                </a:path>
-              </a:pathLst>
-            </a:custGeom>
-            <a:solidFill>
-              <a:srgbClr val="F1F5F9"/>
-            </a:solidFill>
-          </p:spPr>
-          <p:txBody>
-            <a:bodyPr/>
-            <a:lstStyle/>
-            <a:p>
-              <a:endParaRPr lang="zh-TW" altLang="en-US"/>
-            </a:p>
-          </p:txBody>
-        </p:sp>
-      </p:grpSp>
-      <p:grpSp>
-        <p:nvGrpSpPr>
-          <p:cNvPr id="33" name="Group 33"/>
-          <p:cNvGrpSpPr/>
-          <p:nvPr/>
-        </p:nvGrpSpPr>
-        <p:grpSpPr>
-          <a:xfrm>
-            <a:off x="857250" y="7480849"/>
-            <a:ext cx="2914431" cy="14288"/>
-            <a:chOff x="0" y="0"/>
-            <a:chExt cx="3885908" cy="19050"/>
-          </a:xfrm>
-        </p:grpSpPr>
-        <p:sp>
-          <p:nvSpPr>
-            <p:cNvPr id="34" name="Freeform 34"/>
-            <p:cNvSpPr/>
-            <p:nvPr/>
-          </p:nvSpPr>
-          <p:spPr>
-            <a:xfrm>
-              <a:off x="0" y="0"/>
-              <a:ext cx="3885946" cy="19050"/>
-            </a:xfrm>
-            <a:custGeom>
-              <a:avLst/>
-              <a:gdLst/>
-              <a:ahLst/>
-              <a:cxnLst/>
-              <a:rect l="l" t="t" r="r" b="b"/>
-              <a:pathLst>
-                <a:path w="3885946" h="19050">
-                  <a:moveTo>
-                    <a:pt x="0" y="0"/>
-                  </a:moveTo>
-                  <a:lnTo>
-                    <a:pt x="3885946" y="0"/>
-                  </a:lnTo>
-                  <a:lnTo>
-                    <a:pt x="3885946" y="19050"/>
-                  </a:lnTo>
-                  <a:lnTo>
-                    <a:pt x="0" y="19050"/>
-                  </a:lnTo>
-                  <a:close/>
-                </a:path>
-              </a:pathLst>
-            </a:custGeom>
-            <a:solidFill>
-              <a:srgbClr val="F1F5F9"/>
-            </a:solidFill>
-          </p:spPr>
-          <p:txBody>
-            <a:bodyPr/>
-            <a:lstStyle/>
-            <a:p>
-              <a:endParaRPr lang="zh-TW" altLang="en-US"/>
-            </a:p>
-          </p:txBody>
-        </p:sp>
-      </p:grpSp>
-      <p:grpSp>
-        <p:nvGrpSpPr>
-          <p:cNvPr id="35" name="Group 35"/>
-          <p:cNvGrpSpPr/>
-          <p:nvPr/>
-        </p:nvGrpSpPr>
-        <p:grpSpPr>
-          <a:xfrm>
-            <a:off x="3771681" y="7480849"/>
-            <a:ext cx="2696985" cy="14288"/>
-            <a:chOff x="0" y="0"/>
-            <a:chExt cx="3595980" cy="19050"/>
-          </a:xfrm>
-        </p:grpSpPr>
-        <p:sp>
-          <p:nvSpPr>
-            <p:cNvPr id="36" name="Freeform 36"/>
-            <p:cNvSpPr/>
-            <p:nvPr/>
-          </p:nvSpPr>
-          <p:spPr>
-            <a:xfrm>
-              <a:off x="0" y="0"/>
-              <a:ext cx="3596005" cy="19050"/>
-            </a:xfrm>
-            <a:custGeom>
-              <a:avLst/>
-              <a:gdLst/>
-              <a:ahLst/>
-              <a:cxnLst/>
-              <a:rect l="l" t="t" r="r" b="b"/>
-              <a:pathLst>
-                <a:path w="3596005" h="19050">
-                  <a:moveTo>
-                    <a:pt x="0" y="0"/>
-                  </a:moveTo>
-                  <a:lnTo>
-                    <a:pt x="3596005" y="0"/>
-                  </a:lnTo>
-                  <a:lnTo>
-                    <a:pt x="3596005" y="19050"/>
-                  </a:lnTo>
-                  <a:lnTo>
-                    <a:pt x="0" y="19050"/>
-                  </a:lnTo>
-                  <a:close/>
-                </a:path>
-              </a:pathLst>
-            </a:custGeom>
-            <a:solidFill>
-              <a:srgbClr val="F1F5F9"/>
-            </a:solidFill>
-          </p:spPr>
-          <p:txBody>
-            <a:bodyPr/>
-            <a:lstStyle/>
-            <a:p>
-              <a:endParaRPr lang="zh-TW" altLang="en-US"/>
-            </a:p>
-          </p:txBody>
-        </p:sp>
-      </p:grpSp>
-      <p:grpSp>
-        <p:nvGrpSpPr>
-          <p:cNvPr id="37" name="Group 37"/>
-          <p:cNvGrpSpPr/>
-          <p:nvPr/>
-        </p:nvGrpSpPr>
-        <p:grpSpPr>
-          <a:xfrm>
-            <a:off x="6468666" y="7480849"/>
-            <a:ext cx="10962084" cy="14288"/>
-            <a:chOff x="0" y="0"/>
-            <a:chExt cx="14616112" cy="19050"/>
-          </a:xfrm>
-        </p:grpSpPr>
-        <p:sp>
-          <p:nvSpPr>
-            <p:cNvPr id="38" name="Freeform 38"/>
-            <p:cNvSpPr/>
-            <p:nvPr/>
-          </p:nvSpPr>
-          <p:spPr>
-            <a:xfrm>
-              <a:off x="0" y="0"/>
-              <a:ext cx="14616049" cy="19050"/>
-            </a:xfrm>
-            <a:custGeom>
-              <a:avLst/>
-              <a:gdLst/>
-              <a:ahLst/>
-              <a:cxnLst/>
-              <a:rect l="l" t="t" r="r" b="b"/>
-              <a:pathLst>
-                <a:path w="14616049" h="19050">
-                  <a:moveTo>
-                    <a:pt x="0" y="0"/>
-                  </a:moveTo>
-                  <a:lnTo>
-                    <a:pt x="14616049" y="0"/>
-                  </a:lnTo>
-                  <a:lnTo>
-                    <a:pt x="14616049" y="19050"/>
-                  </a:lnTo>
-                  <a:lnTo>
-                    <a:pt x="0" y="19050"/>
-                  </a:lnTo>
-                  <a:close/>
-                </a:path>
-              </a:pathLst>
-            </a:custGeom>
-            <a:solidFill>
-              <a:srgbClr val="F1F5F9"/>
-            </a:solidFill>
-          </p:spPr>
-          <p:txBody>
-            <a:bodyPr/>
-            <a:lstStyle/>
-            <a:p>
-              <a:endParaRPr lang="zh-TW" altLang="en-US"/>
-            </a:p>
-          </p:txBody>
-        </p:sp>
-      </p:grpSp>
-    </p:spTree>
-  </p:cSld>
-  <p:clrMapOvr>
-    <a:masterClrMapping/>
-  </p:clrMapOvr>
-</p:sld>
-</file>
-
-<file path=ppt/slides/slide13.xml><?xml version="1.0" encoding="utf-8"?>
-<p:sld xmlns:a="http://schemas.openxmlformats.org/drawingml/2006/main" xmlns:r="http://schemas.openxmlformats.org/officeDocument/2006/relationships" xmlns:p="http://schemas.openxmlformats.org/presentationml/2006/main">
-  <p:cSld>
-    <p:spTree>
-      <p:nvGrpSpPr>
-        <p:cNvPr id="1" name=""/>
-        <p:cNvGrpSpPr/>
-        <p:nvPr/>
-      </p:nvGrpSpPr>
-      <p:grpSpPr>
-        <a:xfrm>
-          <a:off x="0" y="0"/>
-          <a:ext cx="0" cy="0"/>
-          <a:chOff x="0" y="0"/>
-          <a:chExt cx="0" cy="0"/>
-        </a:xfrm>
-      </p:grpSpPr>
-      <p:grpSp>
-        <p:nvGrpSpPr>
-          <p:cNvPr id="2" name="Group 2"/>
-          <p:cNvGrpSpPr/>
-          <p:nvPr/>
-        </p:nvGrpSpPr>
-        <p:grpSpPr>
-          <a:xfrm>
-            <a:off x="0" y="0"/>
-            <a:ext cx="18288000" cy="10287000"/>
-            <a:chOff x="0" y="0"/>
-            <a:chExt cx="24384000" cy="13716000"/>
-          </a:xfrm>
-        </p:grpSpPr>
-        <p:sp>
-          <p:nvSpPr>
-            <p:cNvPr id="3" name="Freeform 3" descr="image.png"/>
-            <p:cNvSpPr/>
-            <p:nvPr/>
-          </p:nvSpPr>
-          <p:spPr>
-            <a:xfrm>
-              <a:off x="0" y="0"/>
-              <a:ext cx="24384000" cy="13716000"/>
-            </a:xfrm>
-            <a:custGeom>
-              <a:avLst/>
-              <a:gdLst/>
-              <a:ahLst/>
-              <a:cxnLst/>
-              <a:rect l="l" t="t" r="r" b="b"/>
-              <a:pathLst>
-                <a:path w="24384000" h="13716000">
-                  <a:moveTo>
-                    <a:pt x="0" y="0"/>
-                  </a:moveTo>
-                  <a:lnTo>
-                    <a:pt x="24384000" y="0"/>
-                  </a:lnTo>
-                  <a:lnTo>
-                    <a:pt x="24384000" y="13716000"/>
-                  </a:lnTo>
-                  <a:lnTo>
-                    <a:pt x="0" y="13716000"/>
-                  </a:lnTo>
-                  <a:lnTo>
-                    <a:pt x="0" y="0"/>
-                  </a:lnTo>
-                  <a:close/>
-                </a:path>
-              </a:pathLst>
-            </a:custGeom>
-            <a:blipFill>
-              <a:blip r:embed="rId3"/>
-              <a:stretch>
-                <a:fillRect/>
-              </a:stretch>
-            </a:blipFill>
-          </p:spPr>
-          <p:txBody>
-            <a:bodyPr/>
-            <a:lstStyle/>
-            <a:p>
-              <a:endParaRPr lang="zh-TW" altLang="en-US"/>
-            </a:p>
-          </p:txBody>
-        </p:sp>
-      </p:grpSp>
-      <p:sp>
-        <p:nvSpPr>
-          <p:cNvPr id="4" name="TextBox 4"/>
-          <p:cNvSpPr txBox="1"/>
-          <p:nvPr/>
-        </p:nvSpPr>
-        <p:spPr>
-          <a:xfrm>
             <a:off x="6400800" y="3396404"/>
             <a:ext cx="5757510" cy="1384995"/>
           </a:xfrm>
@@ -14282,7 +11846,7 @@
         <p:spPr>
           <a:xfrm>
             <a:off x="857250" y="1302839"/>
-            <a:ext cx="17402175" cy="871537"/>
+            <a:ext cx="17402175" cy="692497"/>
           </a:xfrm>
           <a:prstGeom prst="rect">
             <a:avLst/>
@@ -14300,7 +11864,7 @@
               </a:lnSpc>
             </a:pPr>
             <a:r>
-              <a:rPr lang="en-US" sz="4500" b="1">
+              <a:rPr lang="en-US" sz="4500" b="1" dirty="0" err="1">
                 <a:solidFill>
                   <a:srgbClr val="1E293B"/>
                 </a:solidFill>
@@ -14309,8 +11873,77 @@
                 <a:cs typeface="Arimo Bold"/>
                 <a:sym typeface="Arimo Bold"/>
               </a:rPr>
-              <a:t>演算法實作：DAX 動態皮爾森矩陣</a:t>
-            </a:r>
+              <a:t>演算法實作：DAX</a:t>
+            </a:r>
+            <a:r>
+              <a:rPr lang="en-US" sz="4500" b="1" dirty="0">
+                <a:solidFill>
+                  <a:srgbClr val="1E293B"/>
+                </a:solidFill>
+                <a:latin typeface="Arimo Bold"/>
+                <a:ea typeface="Arimo Bold"/>
+                <a:cs typeface="Arimo Bold"/>
+                <a:sym typeface="Arimo Bold"/>
+              </a:rPr>
+              <a:t> </a:t>
+            </a:r>
+            <a:r>
+              <a:rPr lang="en-US" sz="4500" b="1" dirty="0" err="1">
+                <a:solidFill>
+                  <a:srgbClr val="1E293B"/>
+                </a:solidFill>
+                <a:latin typeface="Arimo Bold"/>
+                <a:ea typeface="Arimo Bold"/>
+                <a:cs typeface="Arimo Bold"/>
+                <a:sym typeface="Arimo Bold"/>
+              </a:rPr>
+              <a:t>動態皮爾森矩陣</a:t>
+            </a:r>
+            <a:r>
+              <a:rPr lang="en-US" altLang="zh-TW" sz="4500" b="1" dirty="0">
+                <a:solidFill>
+                  <a:srgbClr val="1E293B"/>
+                </a:solidFill>
+                <a:latin typeface="Arimo Bold"/>
+                <a:ea typeface="Arimo Bold"/>
+                <a:cs typeface="Arimo Bold"/>
+                <a:sym typeface="Arimo Bold"/>
+              </a:rPr>
+              <a:t>(</a:t>
+            </a:r>
+            <a:r>
+              <a:rPr lang="zh-TW" altLang="en-US" sz="4500" b="1" dirty="0">
+                <a:solidFill>
+                  <a:srgbClr val="1E293B"/>
+                </a:solidFill>
+                <a:latin typeface="Arimo Bold"/>
+                <a:ea typeface="Arimo Bold"/>
+                <a:cs typeface="Arimo Bold"/>
+                <a:sym typeface="Arimo Bold"/>
+              </a:rPr>
+              <a:t>皮爾森相關係數</a:t>
+            </a:r>
+            <a:r>
+              <a:rPr lang="en-US" altLang="zh-TW" sz="4500" b="1" dirty="0">
+                <a:solidFill>
+                  <a:srgbClr val="1E293B"/>
+                </a:solidFill>
+                <a:latin typeface="Arimo Bold"/>
+                <a:ea typeface="Arimo Bold"/>
+                <a:cs typeface="Arimo Bold"/>
+                <a:sym typeface="Arimo Bold"/>
+              </a:rPr>
+              <a:t>)</a:t>
+            </a:r>
+            <a:endParaRPr lang="en-US" sz="4500" b="1" dirty="0">
+              <a:solidFill>
+                <a:srgbClr val="1E293B"/>
+              </a:solidFill>
+              <a:latin typeface="Arimo Bold"/>
+              <a:ea typeface="Arimo Bold"/>
+              <a:cs typeface="Arimo Bold"/>
+              <a:sym typeface="Arimo Bold"/>
+            </a:endParaRPr>
           </a:p>
         </p:txBody>
       </p:sp>
@@ -14913,16 +12546,28 @@
                 <a:cs typeface="Arimo Bold"/>
                 <a:sym typeface="Arimo Bold"/>
               </a:rPr>
-              <a:t>分子：看兩者是否同時偏離平均值</a:t>
+              <a:t>分子：</a:t>
+            </a:r>
+            <a:r>
+              <a:rPr lang="zh-TW" altLang="en-US" sz="2250" b="1" dirty="0">
+                <a:solidFill>
+                  <a:srgbClr val="1E3A8A"/>
+                </a:solidFill>
+                <a:latin typeface="Arimo" panose="020B0604020202020204" charset="0"/>
+                <a:ea typeface="Arimo Bold"/>
+                <a:cs typeface="Arimo" panose="020B0604020202020204" charset="0"/>
+                <a:sym typeface="Arimo Bold"/>
+              </a:rPr>
+              <a:t>看兩者是否同時偏離平均值</a:t>
             </a:r>
             <a:r>
               <a:rPr lang="en-US" altLang="zh-TW" sz="2250" b="1" dirty="0">
                 <a:solidFill>
                   <a:srgbClr val="1E3A8A"/>
                 </a:solidFill>
-                <a:latin typeface="Arimo Bold"/>
-                <a:ea typeface="Arimo Bold"/>
-                <a:cs typeface="Arimo Bold"/>
+                <a:latin typeface="Arimo" panose="020B0604020202020204" charset="0"/>
+                <a:ea typeface="Arimo" panose="020B0604020202020204" charset="0"/>
+                <a:cs typeface="Arimo" panose="020B0604020202020204" charset="0"/>
                 <a:sym typeface="Arimo Bold"/>
               </a:rPr>
               <a:t>(</a:t>
@@ -14932,9 +12577,9 @@
                 <a:solidFill>
                   <a:srgbClr val="1E3A8A"/>
                 </a:solidFill>
-                <a:latin typeface="Arimo Bold"/>
+                <a:latin typeface="Arimo" panose="020B0604020202020204" charset="0"/>
                 <a:ea typeface="Arimo Bold"/>
-                <a:cs typeface="Arimo Bold"/>
+                <a:cs typeface="Arimo" panose="020B0604020202020204" charset="0"/>
                 <a:sym typeface="Arimo Bold"/>
               </a:rPr>
               <a:t>同步性</a:t>
@@ -14944,9 +12589,9 @@
                 <a:solidFill>
                   <a:srgbClr val="1E3A8A"/>
                 </a:solidFill>
-                <a:latin typeface="Arimo Bold"/>
-                <a:ea typeface="Arimo Bold"/>
-                <a:cs typeface="Arimo Bold"/>
+                <a:latin typeface="Arimo" panose="020B0604020202020204" charset="0"/>
+                <a:ea typeface="Arimo" panose="020B0604020202020204" charset="0"/>
+                <a:cs typeface="Arimo" panose="020B0604020202020204" charset="0"/>
                 <a:sym typeface="Arimo Bold"/>
               </a:rPr>
               <a:t>)</a:t>
@@ -14955,9 +12600,9 @@
               <a:solidFill>
                 <a:srgbClr val="334155"/>
               </a:solidFill>
-              <a:latin typeface="Arimo"/>
-              <a:ea typeface="Arimo"/>
-              <a:cs typeface="Arimo"/>
+              <a:latin typeface="Arimo" panose="020B0604020202020204" charset="0"/>
+              <a:ea typeface="Arimo" panose="020B0604020202020204" charset="0"/>
+              <a:cs typeface="Arimo" panose="020B0604020202020204" charset="0"/>
               <a:sym typeface="Arimo"/>
             </a:endParaRPr>
           </a:p>
@@ -16119,8 +13764,8 @@
         </p:nvSpPr>
         <p:spPr>
           <a:xfrm>
-            <a:off x="857250" y="1302839"/>
-            <a:ext cx="17402175" cy="871537"/>
+            <a:off x="759049" y="1304701"/>
+            <a:ext cx="17402175" cy="692497"/>
           </a:xfrm>
           <a:prstGeom prst="rect">
             <a:avLst/>
@@ -16138,7 +13783,31 @@
               </a:lnSpc>
             </a:pPr>
             <a:r>
-              <a:rPr lang="en-US" sz="4500" b="1">
+              <a:rPr lang="en-US" altLang="zh-TW" sz="4500" b="1" dirty="0">
+                <a:solidFill>
+                  <a:srgbClr val="1E293B"/>
+                </a:solidFill>
+                <a:latin typeface="Arimo Bold"/>
+                <a:ea typeface="Arimo Bold"/>
+                <a:cs typeface="Arimo Bold"/>
+                <a:sym typeface="Arimo Bold"/>
+              </a:rPr>
+              <a:t>2023-2026</a:t>
+            </a:r>
+            <a:r>
+              <a:rPr lang="zh-TW" altLang="en-US" sz="4500" b="1" dirty="0">
+                <a:solidFill>
+                  <a:srgbClr val="1E293B"/>
+                </a:solidFill>
+                <a:latin typeface="Arimo Bold"/>
+                <a:ea typeface="Arimo Bold"/>
+                <a:cs typeface="Arimo Bold"/>
+                <a:sym typeface="Arimo Bold"/>
+              </a:rPr>
+              <a:t> </a:t>
+            </a:r>
+            <a:r>
+              <a:rPr lang="en-US" sz="4500" b="1" dirty="0" err="1">
                 <a:solidFill>
                   <a:srgbClr val="1E293B"/>
                 </a:solidFill>
@@ -16149,6 +13818,15 @@
               </a:rPr>
               <a:t>全週期觀測：資產機構化導致強正相關</a:t>
             </a:r>
+            <a:endParaRPr lang="en-US" sz="4500" b="1" dirty="0">
+              <a:solidFill>
+                <a:srgbClr val="1E293B"/>
+              </a:solidFill>
+              <a:latin typeface="Arimo Bold"/>
+              <a:ea typeface="Arimo Bold"/>
+              <a:cs typeface="Arimo Bold"/>
+              <a:sym typeface="Arimo Bold"/>
+            </a:endParaRPr>
           </a:p>
         </p:txBody>
       </p:sp>
